--- a/CKDSurveillance/PPT/Q756.pptx
+++ b/CKDSurveillance/PPT/Q756.pptx
@@ -111,6 +111,11 @@
       </a:defRPr>
     </a:lvl9pPr>
   </p:defaultTextStyle>
+  <p:extLst>
+    <p:ext uri="{EFAFB233-063F-42B5-8137-9DF3F51BA10A}">
+      <p15:sldGuideLst xmlns:p15="http://schemas.microsoft.com/office/powerpoint/2012/main"/>
+    </p:ext>
+  </p:extLst>
 </p:presentation>
 </file>
 
@@ -233,22 +238,22 @@
                 <c:formatCode>General</c:formatCode>
                 <c:ptCount val="15"/>
                 <c:pt idx="0">
-                  <c:v>6.35</c:v>
+                  <c:v>5.85</c:v>
                 </c:pt>
                 <c:pt idx="1">
-                  <c:v>5.99</c:v>
+                  <c:v>5.96</c:v>
                 </c:pt>
                 <c:pt idx="2">
-                  <c:v>5.29</c:v>
+                  <c:v>5.35</c:v>
                 </c:pt>
                 <c:pt idx="3">
-                  <c:v>5.31</c:v>
+                  <c:v>5.35</c:v>
                 </c:pt>
                 <c:pt idx="4">
-                  <c:v>5.0599999999999996</c:v>
+                  <c:v>5.1100000000000003</c:v>
                 </c:pt>
                 <c:pt idx="5">
-                  <c:v>5.03</c:v>
+                  <c:v>5.05</c:v>
                 </c:pt>
                 <c:pt idx="6">
                   <c:v>4.91</c:v>
@@ -283,7 +288,7 @@
           <c:smooth val="0"/>
           <c:extLst>
             <c:ext xmlns:c16="http://schemas.microsoft.com/office/drawing/2014/chart" uri="{C3380CC4-5D6E-409C-BE32-E72D297353CC}">
-              <c16:uniqueId val="{00000000-E179-4040-956B-E7DBCB6189E5}"/>
+              <c16:uniqueId val="{00000000-E486-48E5-A22D-B6B3F5293E75}"/>
             </c:ext>
           </c:extLst>
         </c:ser>
@@ -347,7 +352,7 @@
         <c:lblAlgn val="ctr"/>
         <c:lblOffset val="100"/>
         <c:tickLblSkip val="2"/>
-        <c:tickMarkSkip val="1"/>
+        <c:tickMarkSkip val="2"/>
         <c:noMultiLvlLbl val="0"/>
       </c:catAx>
       <c:valAx>
@@ -389,8 +394,8 @@
                   </a:defRPr>
                 </a:pPr>
                 <a:r>
-                  <a:rPr lang="en-US"/>
-                  <a:t>CKD (%)</a:t>
+                  <a:rPr lang="en-US" dirty="0"/>
+                  <a:t>CKD Stages 3-5 (%)</a:t>
                 </a:r>
               </a:p>
             </c:rich>
@@ -450,7 +455,7 @@
           </a:p>
         </c:txPr>
         <c:crossAx val="487957728"/>
-        <c:crosses val="autoZero"/>
+        <c:crossesAt val="1"/>
         <c:crossBetween val="between"/>
       </c:valAx>
       <c:spPr>
@@ -534,7 +539,7 @@
             </c:strRef>
           </c:tx>
           <c:spPr>
-            <a:ln w="44450" cap="rnd">
+            <a:ln w="28575" cap="rnd">
               <a:solidFill>
                 <a:schemeClr val="tx1"/>
               </a:solidFill>
@@ -615,28 +620,28 @@
             <c:numRef>
               <c:f>Overall!$B$20:$B$34</c:f>
               <c:numCache>
-                <c:formatCode>0.00</c:formatCode>
+                <c:formatCode>General</c:formatCode>
                 <c:ptCount val="15"/>
                 <c:pt idx="0">
-                  <c:v>7.97</c:v>
+                  <c:v>7.65</c:v>
                 </c:pt>
                 <c:pt idx="1">
-                  <c:v>7.62</c:v>
+                  <c:v>7.58</c:v>
                 </c:pt>
                 <c:pt idx="2">
-                  <c:v>7</c:v>
+                  <c:v>6.95</c:v>
                 </c:pt>
                 <c:pt idx="3">
-                  <c:v>7.02</c:v>
+                  <c:v>6.99</c:v>
                 </c:pt>
                 <c:pt idx="4">
-                  <c:v>6.56</c:v>
+                  <c:v>6.53</c:v>
                 </c:pt>
                 <c:pt idx="5">
-                  <c:v>6.36</c:v>
+                  <c:v>6.32</c:v>
                 </c:pt>
                 <c:pt idx="6">
-                  <c:v>6.09</c:v>
+                  <c:v>6.04</c:v>
                 </c:pt>
                 <c:pt idx="7">
                   <c:v>6.19</c:v>
@@ -668,7 +673,7 @@
           <c:smooth val="0"/>
           <c:extLst>
             <c:ext xmlns:c16="http://schemas.microsoft.com/office/drawing/2014/chart" uri="{C3380CC4-5D6E-409C-BE32-E72D297353CC}">
-              <c16:uniqueId val="{00000000-2224-4894-A5B0-AE439D0F9803}"/>
+              <c16:uniqueId val="{00000000-B8BA-4EEB-83D5-0A501DAB1BDA}"/>
             </c:ext>
           </c:extLst>
         </c:ser>
@@ -762,10 +767,24 @@
               <a:bodyPr rot="-5400000" spcFirstLastPara="1" vertOverflow="ellipsis" vert="horz" wrap="square" anchor="ctr" anchorCtr="1"/>
               <a:lstStyle/>
               <a:p>
-                <a:pPr>
+                <a:pPr marL="0" marR="0" lvl="0" indent="0" algn="ctr" defTabSz="914400" rtl="0" eaLnBrk="1" fontAlgn="auto" latinLnBrk="0" hangingPunct="1">
+                  <a:lnSpc>
+                    <a:spcPct val="100000"/>
+                  </a:lnSpc>
+                  <a:spcBef>
+                    <a:spcPts val="0"/>
+                  </a:spcBef>
+                  <a:spcAft>
+                    <a:spcPts val="0"/>
+                  </a:spcAft>
+                  <a:buClrTx/>
+                  <a:buSzTx/>
+                  <a:buFontTx/>
+                  <a:buNone/>
+                  <a:tabLst/>
                   <a:defRPr sz="2400" b="0" i="0" u="none" strike="noStrike" kern="1200" baseline="0">
                     <a:solidFill>
-                      <a:schemeClr val="tx1"/>
+                      <a:prstClr val="black"/>
                     </a:solidFill>
                     <a:latin typeface="+mn-lt"/>
                     <a:ea typeface="+mn-ea"/>
@@ -773,9 +792,14 @@
                   </a:defRPr>
                 </a:pPr>
                 <a:r>
-                  <a:rPr lang="en-US"/>
-                  <a:t>CKD (%)</a:t>
+                  <a:rPr lang="en-US" sz="2400" b="0" i="0" baseline="0" dirty="0">
+                    <a:effectLst/>
+                  </a:rPr>
+                  <a:t>CKD Stages 3-5 (%)</a:t>
                 </a:r>
+                <a:endParaRPr lang="en-US" sz="2400" dirty="0">
+                  <a:effectLst/>
+                </a:endParaRPr>
               </a:p>
             </c:rich>
           </c:tx>
@@ -791,10 +815,24 @@
             <a:bodyPr rot="-5400000" spcFirstLastPara="1" vertOverflow="ellipsis" vert="horz" wrap="square" anchor="ctr" anchorCtr="1"/>
             <a:lstStyle/>
             <a:p>
-              <a:pPr>
+              <a:pPr marL="0" marR="0" lvl="0" indent="0" algn="ctr" defTabSz="914400" rtl="0" eaLnBrk="1" fontAlgn="auto" latinLnBrk="0" hangingPunct="1">
+                <a:lnSpc>
+                  <a:spcPct val="100000"/>
+                </a:lnSpc>
+                <a:spcBef>
+                  <a:spcPts val="0"/>
+                </a:spcBef>
+                <a:spcAft>
+                  <a:spcPts val="0"/>
+                </a:spcAft>
+                <a:buClrTx/>
+                <a:buSzTx/>
+                <a:buFontTx/>
+                <a:buNone/>
+                <a:tabLst/>
                 <a:defRPr sz="2400" b="0" i="0" u="none" strike="noStrike" kern="1200" baseline="0">
                   <a:solidFill>
-                    <a:schemeClr val="tx1"/>
+                    <a:prstClr val="black"/>
                   </a:solidFill>
                   <a:latin typeface="+mn-lt"/>
                   <a:ea typeface="+mn-ea"/>
@@ -943,7 +981,7 @@
           </c:marker>
           <c:cat>
             <c:numRef>
-              <c:f>Age!$A$2:$A$16</c:f>
+              <c:f>Age!$A$18:$A$32</c:f>
               <c:numCache>
                 <c:formatCode>General</c:formatCode>
                 <c:ptCount val="15"/>
@@ -997,54 +1035,54 @@
           </c:cat>
           <c:val>
             <c:numRef>
-              <c:f>Age!$B$2:$B$16</c:f>
+              <c:f>Age!$B$18:$B$32</c:f>
               <c:numCache>
                 <c:formatCode>General</c:formatCode>
                 <c:ptCount val="15"/>
                 <c:pt idx="0">
-                  <c:v>0.31</c:v>
+                  <c:v>0.3</c:v>
                 </c:pt>
                 <c:pt idx="1">
-                  <c:v>0.31</c:v>
+                  <c:v>0.3</c:v>
                 </c:pt>
                 <c:pt idx="2">
-                  <c:v>0.25</c:v>
+                  <c:v>0.2</c:v>
                 </c:pt>
                 <c:pt idx="3">
-                  <c:v>0.25</c:v>
+                  <c:v>0.2</c:v>
                 </c:pt>
                 <c:pt idx="4">
-                  <c:v>0.22</c:v>
+                  <c:v>0.2</c:v>
                 </c:pt>
                 <c:pt idx="5">
-                  <c:v>0.22</c:v>
+                  <c:v>0.2</c:v>
                 </c:pt>
                 <c:pt idx="6">
-                  <c:v>0.22</c:v>
+                  <c:v>0.2</c:v>
                 </c:pt>
                 <c:pt idx="7">
-                  <c:v>0.22</c:v>
+                  <c:v>0.2</c:v>
                 </c:pt>
                 <c:pt idx="8">
-                  <c:v>0.23</c:v>
+                  <c:v>0.2</c:v>
                 </c:pt>
                 <c:pt idx="9">
-                  <c:v>0.25</c:v>
+                  <c:v>0.3</c:v>
                 </c:pt>
                 <c:pt idx="10">
-                  <c:v>0.26</c:v>
+                  <c:v>0.3</c:v>
                 </c:pt>
                 <c:pt idx="11">
-                  <c:v>0.28000000000000003</c:v>
+                  <c:v>0.3</c:v>
                 </c:pt>
                 <c:pt idx="12">
-                  <c:v>0.25</c:v>
+                  <c:v>0.3</c:v>
                 </c:pt>
                 <c:pt idx="13">
-                  <c:v>0.22</c:v>
+                  <c:v>0.2</c:v>
                 </c:pt>
                 <c:pt idx="14">
-                  <c:v>0.23</c:v>
+                  <c:v>0.2</c:v>
                 </c:pt>
               </c:numCache>
             </c:numRef>
@@ -1052,7 +1090,7 @@
           <c:smooth val="0"/>
           <c:extLst>
             <c:ext xmlns:c16="http://schemas.microsoft.com/office/drawing/2014/chart" uri="{C3380CC4-5D6E-409C-BE32-E72D297353CC}">
-              <c16:uniqueId val="{00000000-8132-4354-9358-DC6BD368C121}"/>
+              <c16:uniqueId val="{00000000-738B-4C8A-9434-5DF05F8CC69C}"/>
             </c:ext>
           </c:extLst>
         </c:ser>
@@ -1096,7 +1134,7 @@
           </c:marker>
           <c:cat>
             <c:numRef>
-              <c:f>Age!$A$2:$A$16</c:f>
+              <c:f>Age!$A$18:$A$32</c:f>
               <c:numCache>
                 <c:formatCode>General</c:formatCode>
                 <c:ptCount val="15"/>
@@ -1150,7 +1188,7 @@
           </c:cat>
           <c:val>
             <c:numRef>
-              <c:f>Age!$C$2:$C$16</c:f>
+              <c:f>Age!$C$18:$C$32</c:f>
               <c:numCache>
                 <c:formatCode>General</c:formatCode>
                 <c:ptCount val="15"/>
@@ -1158,46 +1196,46 @@
                   <c:v>0.9</c:v>
                 </c:pt>
                 <c:pt idx="1">
-                  <c:v>0.77</c:v>
+                  <c:v>0.8</c:v>
                 </c:pt>
                 <c:pt idx="2">
-                  <c:v>0.63</c:v>
+                  <c:v>0.6</c:v>
                 </c:pt>
                 <c:pt idx="3">
                   <c:v>0.6</c:v>
                 </c:pt>
                 <c:pt idx="4">
-                  <c:v>0.56999999999999995</c:v>
+                  <c:v>0.6</c:v>
                 </c:pt>
                 <c:pt idx="5">
-                  <c:v>0.56000000000000005</c:v>
+                  <c:v>0.6</c:v>
                 </c:pt>
                 <c:pt idx="6">
-                  <c:v>0.56999999999999995</c:v>
+                  <c:v>0.5</c:v>
                 </c:pt>
                 <c:pt idx="7">
-                  <c:v>0.55000000000000004</c:v>
+                  <c:v>0.6</c:v>
                 </c:pt>
                 <c:pt idx="8">
-                  <c:v>0.57999999999999996</c:v>
+                  <c:v>0.6</c:v>
                 </c:pt>
                 <c:pt idx="9">
                   <c:v>0.6</c:v>
                 </c:pt>
                 <c:pt idx="10">
-                  <c:v>0.62</c:v>
+                  <c:v>0.6</c:v>
                 </c:pt>
                 <c:pt idx="11">
-                  <c:v>0.64</c:v>
+                  <c:v>0.6</c:v>
                 </c:pt>
                 <c:pt idx="12">
-                  <c:v>0.59</c:v>
+                  <c:v>0.6</c:v>
                 </c:pt>
                 <c:pt idx="13">
-                  <c:v>0.54</c:v>
+                  <c:v>0.5</c:v>
                 </c:pt>
                 <c:pt idx="14">
-                  <c:v>0.53</c:v>
+                  <c:v>0.5</c:v>
                 </c:pt>
               </c:numCache>
             </c:numRef>
@@ -1205,7 +1243,7 @@
           <c:smooth val="0"/>
           <c:extLst>
             <c:ext xmlns:c16="http://schemas.microsoft.com/office/drawing/2014/chart" uri="{C3380CC4-5D6E-409C-BE32-E72D297353CC}">
-              <c16:uniqueId val="{00000001-8132-4354-9358-DC6BD368C121}"/>
+              <c16:uniqueId val="{00000001-738B-4C8A-9434-5DF05F8CC69C}"/>
             </c:ext>
           </c:extLst>
         </c:ser>
@@ -1249,7 +1287,7 @@
           </c:marker>
           <c:cat>
             <c:numRef>
-              <c:f>Age!$A$2:$A$16</c:f>
+              <c:f>Age!$A$18:$A$32</c:f>
               <c:numCache>
                 <c:formatCode>General</c:formatCode>
                 <c:ptCount val="15"/>
@@ -1303,51 +1341,51 @@
           </c:cat>
           <c:val>
             <c:numRef>
-              <c:f>Age!$D$2:$D$16</c:f>
+              <c:f>Age!$D$18:$D$32</c:f>
               <c:numCache>
                 <c:formatCode>General</c:formatCode>
                 <c:ptCount val="15"/>
                 <c:pt idx="0">
-                  <c:v>2.2000000000000002</c:v>
+                  <c:v>2.1</c:v>
                 </c:pt>
                 <c:pt idx="1">
                   <c:v>2</c:v>
                 </c:pt>
                 <c:pt idx="2">
-                  <c:v>1.66</c:v>
+                  <c:v>1.6</c:v>
                 </c:pt>
                 <c:pt idx="3">
-                  <c:v>1.75</c:v>
+                  <c:v>1.7</c:v>
                 </c:pt>
                 <c:pt idx="4">
-                  <c:v>1.63</c:v>
+                  <c:v>1.6</c:v>
                 </c:pt>
                 <c:pt idx="5">
-                  <c:v>1.59</c:v>
+                  <c:v>1.6</c:v>
                 </c:pt>
                 <c:pt idx="6">
-                  <c:v>1.51</c:v>
+                  <c:v>1.5</c:v>
                 </c:pt>
                 <c:pt idx="7">
-                  <c:v>1.57</c:v>
+                  <c:v>1.6</c:v>
                 </c:pt>
                 <c:pt idx="8">
-                  <c:v>1.61</c:v>
+                  <c:v>1.6</c:v>
                 </c:pt>
                 <c:pt idx="9">
-                  <c:v>1.63</c:v>
+                  <c:v>1.6</c:v>
                 </c:pt>
                 <c:pt idx="10">
                   <c:v>1.7</c:v>
                 </c:pt>
                 <c:pt idx="11">
-                  <c:v>1.82</c:v>
+                  <c:v>1.8</c:v>
                 </c:pt>
                 <c:pt idx="12">
-                  <c:v>1.56</c:v>
+                  <c:v>1.6</c:v>
                 </c:pt>
                 <c:pt idx="13">
-                  <c:v>1.43</c:v>
+                  <c:v>1.4</c:v>
                 </c:pt>
                 <c:pt idx="14">
                   <c:v>1.4</c:v>
@@ -1358,7 +1396,7 @@
           <c:smooth val="0"/>
           <c:extLst>
             <c:ext xmlns:c16="http://schemas.microsoft.com/office/drawing/2014/chart" uri="{C3380CC4-5D6E-409C-BE32-E72D297353CC}">
-              <c16:uniqueId val="{00000002-8132-4354-9358-DC6BD368C121}"/>
+              <c16:uniqueId val="{00000002-738B-4C8A-9434-5DF05F8CC69C}"/>
             </c:ext>
           </c:extLst>
         </c:ser>
@@ -1402,7 +1440,7 @@
           </c:marker>
           <c:cat>
             <c:numRef>
-              <c:f>Age!$A$2:$A$16</c:f>
+              <c:f>Age!$A$18:$A$32</c:f>
               <c:numCache>
                 <c:formatCode>General</c:formatCode>
                 <c:ptCount val="15"/>
@@ -1456,54 +1494,54 @@
           </c:cat>
           <c:val>
             <c:numRef>
-              <c:f>Age!$E$2:$E$16</c:f>
+              <c:f>Age!$E$18:$E$32</c:f>
               <c:numCache>
                 <c:formatCode>General</c:formatCode>
                 <c:ptCount val="15"/>
                 <c:pt idx="0">
-                  <c:v>5.66</c:v>
+                  <c:v>5.4</c:v>
                 </c:pt>
                 <c:pt idx="1">
-                  <c:v>5.13</c:v>
+                  <c:v>5.0999999999999996</c:v>
                 </c:pt>
                 <c:pt idx="2">
-                  <c:v>4.47</c:v>
+                  <c:v>4.4000000000000004</c:v>
                 </c:pt>
                 <c:pt idx="3">
-                  <c:v>4.5199999999999996</c:v>
+                  <c:v>4.5</c:v>
                 </c:pt>
                 <c:pt idx="4">
-                  <c:v>4.09</c:v>
+                  <c:v>4</c:v>
                 </c:pt>
                 <c:pt idx="5">
-                  <c:v>3.84</c:v>
+                  <c:v>3.8</c:v>
                 </c:pt>
                 <c:pt idx="6">
-                  <c:v>3.55</c:v>
+                  <c:v>3.5</c:v>
                 </c:pt>
                 <c:pt idx="7">
-                  <c:v>3.68</c:v>
+                  <c:v>3.7</c:v>
                 </c:pt>
                 <c:pt idx="8">
-                  <c:v>3.89</c:v>
+                  <c:v>3.9</c:v>
                 </c:pt>
                 <c:pt idx="9">
-                  <c:v>3.91</c:v>
+                  <c:v>3.9</c:v>
                 </c:pt>
                 <c:pt idx="10">
-                  <c:v>4.21</c:v>
+                  <c:v>4.2</c:v>
                 </c:pt>
                 <c:pt idx="11">
                   <c:v>4.5</c:v>
                 </c:pt>
                 <c:pt idx="12">
-                  <c:v>4.12</c:v>
+                  <c:v>4.0999999999999996</c:v>
                 </c:pt>
                 <c:pt idx="13">
-                  <c:v>4.0599999999999996</c:v>
+                  <c:v>4.0999999999999996</c:v>
                 </c:pt>
                 <c:pt idx="14">
-                  <c:v>3.91</c:v>
+                  <c:v>3.9</c:v>
                 </c:pt>
               </c:numCache>
             </c:numRef>
@@ -1511,7 +1549,7 @@
           <c:smooth val="0"/>
           <c:extLst>
             <c:ext xmlns:c16="http://schemas.microsoft.com/office/drawing/2014/chart" uri="{C3380CC4-5D6E-409C-BE32-E72D297353CC}">
-              <c16:uniqueId val="{00000003-8132-4354-9358-DC6BD368C121}"/>
+              <c16:uniqueId val="{00000003-738B-4C8A-9434-5DF05F8CC69C}"/>
             </c:ext>
           </c:extLst>
         </c:ser>
@@ -1555,7 +1593,7 @@
           </c:marker>
           <c:cat>
             <c:numRef>
-              <c:f>Age!$A$2:$A$16</c:f>
+              <c:f>Age!$A$18:$A$32</c:f>
               <c:numCache>
                 <c:formatCode>General</c:formatCode>
                 <c:ptCount val="15"/>
@@ -1609,54 +1647,54 @@
           </c:cat>
           <c:val>
             <c:numRef>
-              <c:f>Age!$F$2:$F$16</c:f>
+              <c:f>Age!$F$18:$F$32</c:f>
               <c:numCache>
                 <c:formatCode>General</c:formatCode>
                 <c:ptCount val="15"/>
                 <c:pt idx="0">
-                  <c:v>13.58</c:v>
+                  <c:v>13</c:v>
                 </c:pt>
                 <c:pt idx="1">
-                  <c:v>12.56</c:v>
+                  <c:v>12.5</c:v>
                 </c:pt>
                 <c:pt idx="2">
-                  <c:v>11.35</c:v>
+                  <c:v>11.3</c:v>
                 </c:pt>
                 <c:pt idx="3">
-                  <c:v>11.2</c:v>
+                  <c:v>11.1</c:v>
                 </c:pt>
                 <c:pt idx="4">
+                  <c:v>10.1</c:v>
+                </c:pt>
+                <c:pt idx="5">
+                  <c:v>9.6</c:v>
+                </c:pt>
+                <c:pt idx="6">
+                  <c:v>9</c:v>
+                </c:pt>
+                <c:pt idx="7">
+                  <c:v>9.1999999999999993</c:v>
+                </c:pt>
+                <c:pt idx="8">
+                  <c:v>9.6</c:v>
+                </c:pt>
+                <c:pt idx="9">
+                  <c:v>9.6</c:v>
+                </c:pt>
+                <c:pt idx="10">
+                  <c:v>9.6999999999999993</c:v>
+                </c:pt>
+                <c:pt idx="11">
                   <c:v>10.199999999999999</c:v>
                 </c:pt>
-                <c:pt idx="5">
-                  <c:v>9.69</c:v>
-                </c:pt>
-                <c:pt idx="6">
-                  <c:v>9.06</c:v>
-                </c:pt>
-                <c:pt idx="7">
-                  <c:v>9.18</c:v>
-                </c:pt>
-                <c:pt idx="8">
-                  <c:v>9.61</c:v>
-                </c:pt>
-                <c:pt idx="9">
-                  <c:v>9.59</c:v>
-                </c:pt>
-                <c:pt idx="10">
-                  <c:v>9.66</c:v>
-                </c:pt>
-                <c:pt idx="11">
-                  <c:v>10.15</c:v>
-                </c:pt>
                 <c:pt idx="12">
-                  <c:v>9.2899999999999991</c:v>
+                  <c:v>9.3000000000000007</c:v>
                 </c:pt>
                 <c:pt idx="13">
-                  <c:v>8.89</c:v>
+                  <c:v>8.9</c:v>
                 </c:pt>
                 <c:pt idx="14">
-                  <c:v>8.26</c:v>
+                  <c:v>8.3000000000000007</c:v>
                 </c:pt>
               </c:numCache>
             </c:numRef>
@@ -1664,7 +1702,7 @@
           <c:smooth val="0"/>
           <c:extLst>
             <c:ext xmlns:c16="http://schemas.microsoft.com/office/drawing/2014/chart" uri="{C3380CC4-5D6E-409C-BE32-E72D297353CC}">
-              <c16:uniqueId val="{00000004-8132-4354-9358-DC6BD368C121}"/>
+              <c16:uniqueId val="{00000004-738B-4C8A-9434-5DF05F8CC69C}"/>
             </c:ext>
           </c:extLst>
         </c:ser>
@@ -1685,7 +1723,7 @@
           <c:spPr>
             <a:ln w="44450" cap="rnd">
               <a:solidFill>
-                <a:schemeClr val="accent6"/>
+                <a:srgbClr val="70AD47"/>
               </a:solidFill>
               <a:round/>
             </a:ln>
@@ -1708,7 +1746,7 @@
           </c:marker>
           <c:cat>
             <c:numRef>
-              <c:f>Age!$A$2:$A$16</c:f>
+              <c:f>Age!$A$18:$A$32</c:f>
               <c:numCache>
                 <c:formatCode>General</c:formatCode>
                 <c:ptCount val="15"/>
@@ -1762,30 +1800,30 @@
           </c:cat>
           <c:val>
             <c:numRef>
-              <c:f>Age!$G$2:$G$16</c:f>
+              <c:f>Age!$G$18:$G$32</c:f>
               <c:numCache>
                 <c:formatCode>General</c:formatCode>
                 <c:ptCount val="15"/>
                 <c:pt idx="0">
-                  <c:v>37.950000000000003</c:v>
+                  <c:v>36.4</c:v>
                 </c:pt>
                 <c:pt idx="1">
-                  <c:v>37.43</c:v>
+                  <c:v>37.4</c:v>
                 </c:pt>
                 <c:pt idx="2">
-                  <c:v>35.35</c:v>
+                  <c:v>35.299999999999997</c:v>
                 </c:pt>
                 <c:pt idx="3">
-                  <c:v>35.51</c:v>
+                  <c:v>35.5</c:v>
                 </c:pt>
                 <c:pt idx="4">
-                  <c:v>33.53</c:v>
+                  <c:v>33.5</c:v>
                 </c:pt>
                 <c:pt idx="5">
-                  <c:v>32.659999999999997</c:v>
+                  <c:v>32.6</c:v>
                 </c:pt>
                 <c:pt idx="6">
-                  <c:v>31.67</c:v>
+                  <c:v>31.6</c:v>
                 </c:pt>
                 <c:pt idx="7">
                   <c:v>32</c:v>
@@ -1794,22 +1832,22 @@
                   <c:v>33.299999999999997</c:v>
                 </c:pt>
                 <c:pt idx="9">
-                  <c:v>32.630000000000003</c:v>
+                  <c:v>32.6</c:v>
                 </c:pt>
                 <c:pt idx="10">
-                  <c:v>32.53</c:v>
+                  <c:v>32.5</c:v>
                 </c:pt>
                 <c:pt idx="11">
-                  <c:v>32.75</c:v>
+                  <c:v>32.799999999999997</c:v>
                 </c:pt>
                 <c:pt idx="12">
-                  <c:v>30.89</c:v>
+                  <c:v>30.9</c:v>
                 </c:pt>
                 <c:pt idx="13">
-                  <c:v>29.78</c:v>
+                  <c:v>29.8</c:v>
                 </c:pt>
                 <c:pt idx="14">
-                  <c:v>28.09</c:v>
+                  <c:v>28.1</c:v>
                 </c:pt>
               </c:numCache>
             </c:numRef>
@@ -1817,7 +1855,7 @@
           <c:smooth val="0"/>
           <c:extLst>
             <c:ext xmlns:c16="http://schemas.microsoft.com/office/drawing/2014/chart" uri="{C3380CC4-5D6E-409C-BE32-E72D297353CC}">
-              <c16:uniqueId val="{00000005-8132-4354-9358-DC6BD368C121}"/>
+              <c16:uniqueId val="{00000005-738B-4C8A-9434-5DF05F8CC69C}"/>
             </c:ext>
           </c:extLst>
         </c:ser>
@@ -1862,7 +1900,7 @@
           </c:marker>
           <c:cat>
             <c:numRef>
-              <c:f>Age!$A$2:$A$16</c:f>
+              <c:f>Age!$A$18:$A$32</c:f>
               <c:numCache>
                 <c:formatCode>General</c:formatCode>
                 <c:ptCount val="15"/>
@@ -1916,54 +1954,54 @@
           </c:cat>
           <c:val>
             <c:numRef>
-              <c:f>Age!$H$2:$H$16</c:f>
+              <c:f>Age!$H$18:$H$32</c:f>
               <c:numCache>
                 <c:formatCode>General</c:formatCode>
                 <c:ptCount val="15"/>
                 <c:pt idx="0">
-                  <c:v>6.35</c:v>
+                  <c:v>5.9</c:v>
                 </c:pt>
                 <c:pt idx="1">
-                  <c:v>5.99</c:v>
+                  <c:v>6</c:v>
                 </c:pt>
                 <c:pt idx="2">
-                  <c:v>5.29</c:v>
+                  <c:v>5.4</c:v>
                 </c:pt>
                 <c:pt idx="3">
-                  <c:v>5.31</c:v>
+                  <c:v>5.4</c:v>
                 </c:pt>
                 <c:pt idx="4">
-                  <c:v>5.0599999999999996</c:v>
+                  <c:v>5.0999999999999996</c:v>
                 </c:pt>
                 <c:pt idx="5">
-                  <c:v>5.03</c:v>
+                  <c:v>5.0999999999999996</c:v>
                 </c:pt>
                 <c:pt idx="6">
-                  <c:v>4.91</c:v>
+                  <c:v>4.9000000000000004</c:v>
                 </c:pt>
                 <c:pt idx="7">
-                  <c:v>5.09</c:v>
+                  <c:v>5.0999999999999996</c:v>
                 </c:pt>
                 <c:pt idx="8">
-                  <c:v>5.46</c:v>
+                  <c:v>5.5</c:v>
                 </c:pt>
                 <c:pt idx="9">
-                  <c:v>5.45</c:v>
+                  <c:v>5.5</c:v>
                 </c:pt>
                 <c:pt idx="10">
-                  <c:v>5.45</c:v>
+                  <c:v>5.5</c:v>
                 </c:pt>
                 <c:pt idx="11">
-                  <c:v>5.89</c:v>
+                  <c:v>5.9</c:v>
                 </c:pt>
                 <c:pt idx="12">
-                  <c:v>5.37</c:v>
+                  <c:v>5.4</c:v>
                 </c:pt>
                 <c:pt idx="13">
-                  <c:v>5.14</c:v>
+                  <c:v>5.0999999999999996</c:v>
                 </c:pt>
                 <c:pt idx="14">
-                  <c:v>4.84</c:v>
+                  <c:v>4.8</c:v>
                 </c:pt>
               </c:numCache>
             </c:numRef>
@@ -1971,7 +2009,7 @@
           <c:smooth val="0"/>
           <c:extLst>
             <c:ext xmlns:c16="http://schemas.microsoft.com/office/drawing/2014/chart" uri="{C3380CC4-5D6E-409C-BE32-E72D297353CC}">
-              <c16:uniqueId val="{00000006-8132-4354-9358-DC6BD368C121}"/>
+              <c16:uniqueId val="{00000006-738B-4C8A-9434-5DF05F8CC69C}"/>
             </c:ext>
           </c:extLst>
         </c:ser>
@@ -2076,7 +2114,7 @@
                 </a:pPr>
                 <a:r>
                   <a:rPr lang="en-US"/>
-                  <a:t>CKD (%)</a:t>
+                  <a:t>CKD Stages 3-5 (%)</a:t>
                 </a:r>
               </a:p>
             </c:rich>
@@ -2136,8 +2174,8 @@
           </a:p>
         </c:txPr>
         <c:crossAx val="1630435104"/>
-        <c:crossesAt val="1"/>
-        <c:crossBetween val="midCat"/>
+        <c:crosses val="autoZero"/>
+        <c:crossBetween val="between"/>
       </c:valAx>
       <c:spPr>
         <a:noFill/>
@@ -2149,6 +2187,16 @@
     </c:plotArea>
     <c:legend>
       <c:legendPos val="b"/>
+      <c:layout>
+        <c:manualLayout>
+          <c:xMode val="edge"/>
+          <c:yMode val="edge"/>
+          <c:x val="0"/>
+          <c:y val="0.79304418197725279"/>
+          <c:w val="0.99948906386701664"/>
+          <c:h val="0.19028915135608049"/>
+        </c:manualLayout>
+      </c:layout>
       <c:overlay val="0"/>
       <c:spPr>
         <a:noFill/>
@@ -2229,17 +2277,7 @@
   <c:chart>
     <c:autoTitleDeleted val="1"/>
     <c:plotArea>
-      <c:layout>
-        <c:manualLayout>
-          <c:layoutTarget val="inner"/>
-          <c:xMode val="edge"/>
-          <c:yMode val="edge"/>
-          <c:x val="9.247130358705162E-2"/>
-          <c:y val="0.10735411198600175"/>
-          <c:w val="0.87641758530183722"/>
-          <c:h val="0.68978390201224848"/>
-        </c:manualLayout>
-      </c:layout>
+      <c:layout/>
       <c:lineChart>
         <c:grouping val="standard"/>
         <c:varyColors val="0"/>
@@ -2342,25 +2380,25 @@
                 <c:formatCode>General</c:formatCode>
                 <c:ptCount val="15"/>
                 <c:pt idx="0">
-                  <c:v>6.46</c:v>
+                  <c:v>5.91</c:v>
                 </c:pt>
                 <c:pt idx="1">
-                  <c:v>6.12</c:v>
+                  <c:v>6.09</c:v>
                 </c:pt>
                 <c:pt idx="2">
-                  <c:v>5.19</c:v>
+                  <c:v>5.42</c:v>
                 </c:pt>
                 <c:pt idx="3">
-                  <c:v>5.29</c:v>
+                  <c:v>5.47</c:v>
                 </c:pt>
                 <c:pt idx="4">
-                  <c:v>5.14</c:v>
+                  <c:v>5.32</c:v>
                 </c:pt>
                 <c:pt idx="5">
-                  <c:v>5.19</c:v>
+                  <c:v>5.34</c:v>
                 </c:pt>
                 <c:pt idx="6">
-                  <c:v>5.0999999999999996</c:v>
+                  <c:v>5.21</c:v>
                 </c:pt>
                 <c:pt idx="7">
                   <c:v>5.43</c:v>
@@ -2392,7 +2430,7 @@
           <c:smooth val="0"/>
           <c:extLst>
             <c:ext xmlns:c16="http://schemas.microsoft.com/office/drawing/2014/chart" uri="{C3380CC4-5D6E-409C-BE32-E72D297353CC}">
-              <c16:uniqueId val="{00000000-7D6E-4508-8C18-8F0EFA0772A5}"/>
+              <c16:uniqueId val="{00000000-CAC1-4704-9197-96D852DCF354}"/>
             </c:ext>
           </c:extLst>
         </c:ser>
@@ -2495,25 +2533,25 @@
                 <c:formatCode>General</c:formatCode>
                 <c:ptCount val="15"/>
                 <c:pt idx="0">
-                  <c:v>6.24</c:v>
+                  <c:v>5.8</c:v>
                 </c:pt>
                 <c:pt idx="1">
-                  <c:v>5.87</c:v>
+                  <c:v>5.84</c:v>
                 </c:pt>
                 <c:pt idx="2">
-                  <c:v>5.38</c:v>
+                  <c:v>5.28</c:v>
                 </c:pt>
                 <c:pt idx="3">
-                  <c:v>5.32</c:v>
+                  <c:v>5.24</c:v>
                 </c:pt>
                 <c:pt idx="4">
-                  <c:v>4.99</c:v>
+                  <c:v>4.91</c:v>
                 </c:pt>
                 <c:pt idx="5">
-                  <c:v>4.87</c:v>
+                  <c:v>4.78</c:v>
                 </c:pt>
                 <c:pt idx="6">
-                  <c:v>4.72</c:v>
+                  <c:v>4.63</c:v>
                 </c:pt>
                 <c:pt idx="7">
                   <c:v>4.76</c:v>
@@ -2545,7 +2583,7 @@
           <c:smooth val="0"/>
           <c:extLst>
             <c:ext xmlns:c16="http://schemas.microsoft.com/office/drawing/2014/chart" uri="{C3380CC4-5D6E-409C-BE32-E72D297353CC}">
-              <c16:uniqueId val="{00000001-7D6E-4508-8C18-8F0EFA0772A5}"/>
+              <c16:uniqueId val="{00000001-CAC1-4704-9197-96D852DCF354}"/>
             </c:ext>
           </c:extLst>
         </c:ser>
@@ -2649,22 +2687,22 @@
                 <c:formatCode>General</c:formatCode>
                 <c:ptCount val="15"/>
                 <c:pt idx="0">
-                  <c:v>6.35</c:v>
+                  <c:v>5.85</c:v>
                 </c:pt>
                 <c:pt idx="1">
-                  <c:v>5.99</c:v>
+                  <c:v>5.96</c:v>
                 </c:pt>
                 <c:pt idx="2">
-                  <c:v>5.29</c:v>
+                  <c:v>5.35</c:v>
                 </c:pt>
                 <c:pt idx="3">
-                  <c:v>5.31</c:v>
+                  <c:v>5.35</c:v>
                 </c:pt>
                 <c:pt idx="4">
-                  <c:v>5.0599999999999996</c:v>
+                  <c:v>5.1100000000000003</c:v>
                 </c:pt>
                 <c:pt idx="5">
-                  <c:v>5.03</c:v>
+                  <c:v>5.05</c:v>
                 </c:pt>
                 <c:pt idx="6">
                   <c:v>4.91</c:v>
@@ -2699,7 +2737,7 @@
           <c:smooth val="0"/>
           <c:extLst>
             <c:ext xmlns:c16="http://schemas.microsoft.com/office/drawing/2014/chart" uri="{C3380CC4-5D6E-409C-BE32-E72D297353CC}">
-              <c16:uniqueId val="{00000002-7D6E-4508-8C18-8F0EFA0772A5}"/>
+              <c16:uniqueId val="{00000002-CAC1-4704-9197-96D852DCF354}"/>
             </c:ext>
           </c:extLst>
         </c:ser>
@@ -2804,8 +2842,8 @@
                   </a:defRPr>
                 </a:pPr>
                 <a:r>
-                  <a:rPr lang="en-US"/>
-                  <a:t>CKD (%)</a:t>
+                  <a:rPr lang="en-US" dirty="0"/>
+                  <a:t>CKD Stages 3-5 (%)</a:t>
                 </a:r>
               </a:p>
             </c:rich>
@@ -2977,7 +3015,7 @@
             </c:strRef>
           </c:tx>
           <c:spPr>
-            <a:ln w="44450" cap="rnd">
+            <a:ln w="41275" cap="rnd">
               <a:solidFill>
                 <a:schemeClr val="accent1"/>
               </a:solidFill>
@@ -3058,28 +3096,28 @@
             <c:numRef>
               <c:f>Sex!$B$22:$B$36</c:f>
               <c:numCache>
-                <c:formatCode>0.00</c:formatCode>
+                <c:formatCode>General</c:formatCode>
                 <c:ptCount val="15"/>
                 <c:pt idx="0">
-                  <c:v>7.6828500000000002</c:v>
+                  <c:v>7.35</c:v>
                 </c:pt>
                 <c:pt idx="1">
-                  <c:v>7.4261699999999999</c:v>
+                  <c:v>7.38</c:v>
                 </c:pt>
                 <c:pt idx="2">
-                  <c:v>6.7838000000000003</c:v>
+                  <c:v>6.75</c:v>
                 </c:pt>
                 <c:pt idx="3">
-                  <c:v>6.8992300000000002</c:v>
+                  <c:v>6.85</c:v>
                 </c:pt>
                 <c:pt idx="4">
-                  <c:v>6.5240200000000002</c:v>
+                  <c:v>6.49</c:v>
                 </c:pt>
                 <c:pt idx="5">
-                  <c:v>6.4065500000000002</c:v>
+                  <c:v>6.38</c:v>
                 </c:pt>
                 <c:pt idx="6">
-                  <c:v>6.1879200000000001</c:v>
+                  <c:v>6.15</c:v>
                 </c:pt>
                 <c:pt idx="7">
                   <c:v>6.35</c:v>
@@ -3111,7 +3149,7 @@
           <c:smooth val="0"/>
           <c:extLst>
             <c:ext xmlns:c16="http://schemas.microsoft.com/office/drawing/2014/chart" uri="{C3380CC4-5D6E-409C-BE32-E72D297353CC}">
-              <c16:uniqueId val="{00000000-FDC7-43A3-90B8-A93C02693B54}"/>
+              <c16:uniqueId val="{00000000-EFE7-445F-99A9-DC7DCD194638}"/>
             </c:ext>
           </c:extLst>
         </c:ser>
@@ -3211,28 +3249,28 @@
             <c:numRef>
               <c:f>Sex!$C$22:$C$36</c:f>
               <c:numCache>
-                <c:formatCode>0.00</c:formatCode>
+                <c:formatCode>General</c:formatCode>
                 <c:ptCount val="15"/>
                 <c:pt idx="0">
-                  <c:v>8.2664500000000007</c:v>
+                  <c:v>7.96</c:v>
                 </c:pt>
                 <c:pt idx="1">
-                  <c:v>7.83413</c:v>
+                  <c:v>7.8</c:v>
                 </c:pt>
                 <c:pt idx="2">
-                  <c:v>7.2176600000000004</c:v>
+                  <c:v>7.17</c:v>
                 </c:pt>
                 <c:pt idx="3">
-                  <c:v>7.1690800000000001</c:v>
+                  <c:v>7.13</c:v>
                 </c:pt>
                 <c:pt idx="4">
-                  <c:v>6.60121</c:v>
+                  <c:v>6.56</c:v>
                 </c:pt>
                 <c:pt idx="5">
-                  <c:v>6.2947100000000002</c:v>
+                  <c:v>6.25</c:v>
                 </c:pt>
                 <c:pt idx="6">
-                  <c:v>5.9933399999999999</c:v>
+                  <c:v>5.95</c:v>
                 </c:pt>
                 <c:pt idx="7">
                   <c:v>6.02</c:v>
@@ -3264,7 +3302,7 @@
           <c:smooth val="0"/>
           <c:extLst>
             <c:ext xmlns:c16="http://schemas.microsoft.com/office/drawing/2014/chart" uri="{C3380CC4-5D6E-409C-BE32-E72D297353CC}">
-              <c16:uniqueId val="{00000001-FDC7-43A3-90B8-A93C02693B54}"/>
+              <c16:uniqueId val="{00000001-EFE7-445F-99A9-DC7DCD194638}"/>
             </c:ext>
           </c:extLst>
         </c:ser>
@@ -3365,28 +3403,28 @@
             <c:numRef>
               <c:f>Sex!$D$22:$D$36</c:f>
               <c:numCache>
-                <c:formatCode>0.00</c:formatCode>
+                <c:formatCode>General</c:formatCode>
                 <c:ptCount val="15"/>
                 <c:pt idx="0">
-                  <c:v>7.97</c:v>
+                  <c:v>7.65</c:v>
                 </c:pt>
                 <c:pt idx="1">
-                  <c:v>7.62</c:v>
+                  <c:v>7.58</c:v>
                 </c:pt>
                 <c:pt idx="2">
-                  <c:v>7</c:v>
+                  <c:v>6.95</c:v>
                 </c:pt>
                 <c:pt idx="3">
-                  <c:v>7.02</c:v>
+                  <c:v>6.99</c:v>
                 </c:pt>
                 <c:pt idx="4">
-                  <c:v>6.56</c:v>
+                  <c:v>6.53</c:v>
                 </c:pt>
                 <c:pt idx="5">
-                  <c:v>6.36</c:v>
+                  <c:v>6.32</c:v>
                 </c:pt>
                 <c:pt idx="6">
-                  <c:v>6.09</c:v>
+                  <c:v>6.04</c:v>
                 </c:pt>
                 <c:pt idx="7">
                   <c:v>6.19</c:v>
@@ -3418,7 +3456,7 @@
           <c:smooth val="0"/>
           <c:extLst>
             <c:ext xmlns:c16="http://schemas.microsoft.com/office/drawing/2014/chart" uri="{C3380CC4-5D6E-409C-BE32-E72D297353CC}">
-              <c16:uniqueId val="{00000002-FDC7-43A3-90B8-A93C02693B54}"/>
+              <c16:uniqueId val="{00000002-EFE7-445F-99A9-DC7DCD194638}"/>
             </c:ext>
           </c:extLst>
         </c:ser>
@@ -3482,7 +3520,6 @@
         <c:lblAlgn val="ctr"/>
         <c:lblOffset val="100"/>
         <c:tickLblSkip val="2"/>
-        <c:tickMarkSkip val="1"/>
         <c:noMultiLvlLbl val="0"/>
       </c:catAx>
       <c:valAx>
@@ -3524,8 +3561,16 @@
                   </a:defRPr>
                 </a:pPr>
                 <a:r>
-                  <a:rPr lang="en-US"/>
-                  <a:t>CKD (%)</a:t>
+                  <a:rPr lang="en-US" dirty="0"/>
+                  <a:t>CKD Stages</a:t>
+                </a:r>
+                <a:r>
+                  <a:rPr lang="en-US" baseline="0" dirty="0"/>
+                  <a:t> 3-5 </a:t>
+                </a:r>
+                <a:r>
+                  <a:rPr lang="en-US" dirty="0"/>
+                  <a:t>(%)</a:t>
                 </a:r>
               </a:p>
             </c:rich>
@@ -3585,7 +3630,7 @@
           </a:p>
         </c:txPr>
         <c:crossAx val="492715488"/>
-        <c:crossesAt val="1"/>
+        <c:crosses val="autoZero"/>
         <c:crossBetween val="between"/>
       </c:valAx>
       <c:spPr>
@@ -3678,17 +3723,7 @@
   <c:chart>
     <c:autoTitleDeleted val="1"/>
     <c:plotArea>
-      <c:layout>
-        <c:manualLayout>
-          <c:layoutTarget val="inner"/>
-          <c:xMode val="edge"/>
-          <c:yMode val="edge"/>
-          <c:x val="0.10154356955380578"/>
-          <c:y val="6.0131889763779527E-2"/>
-          <c:w val="0.88623420822397203"/>
-          <c:h val="0.53282239720034996"/>
-        </c:manualLayout>
-      </c:layout>
+      <c:layout/>
       <c:lineChart>
         <c:grouping val="standard"/>
         <c:varyColors val="0"/>
@@ -3786,54 +3821,54 @@
           </c:cat>
           <c:val>
             <c:numRef>
-              <c:f>Race!$B$2:$B$16</c:f>
+              <c:f>Race!$B$18:$B$32</c:f>
               <c:numCache>
                 <c:formatCode>General</c:formatCode>
                 <c:ptCount val="15"/>
                 <c:pt idx="0">
-                  <c:v>2.63</c:v>
+                  <c:v>3.3</c:v>
                 </c:pt>
                 <c:pt idx="1">
-                  <c:v>2.5499999999999998</c:v>
+                  <c:v>3.4</c:v>
                 </c:pt>
                 <c:pt idx="2">
-                  <c:v>2.14</c:v>
+                  <c:v>3.1</c:v>
                 </c:pt>
                 <c:pt idx="3">
-                  <c:v>2.2799999999999998</c:v>
+                  <c:v>3.3</c:v>
                 </c:pt>
                 <c:pt idx="4">
-                  <c:v>2.19</c:v>
+                  <c:v>3.2</c:v>
                 </c:pt>
                 <c:pt idx="5">
-                  <c:v>2.2599999999999998</c:v>
+                  <c:v>3.3</c:v>
                 </c:pt>
                 <c:pt idx="6">
-                  <c:v>2.23</c:v>
+                  <c:v>3.3</c:v>
                 </c:pt>
                 <c:pt idx="7">
-                  <c:v>3.58</c:v>
+                  <c:v>3.6</c:v>
                 </c:pt>
                 <c:pt idx="8">
-                  <c:v>3.98</c:v>
+                  <c:v>4</c:v>
                 </c:pt>
                 <c:pt idx="9">
-                  <c:v>4.08</c:v>
+                  <c:v>4.0999999999999996</c:v>
                 </c:pt>
                 <c:pt idx="10">
-                  <c:v>4.1399999999999997</c:v>
+                  <c:v>4.0999999999999996</c:v>
                 </c:pt>
                 <c:pt idx="11">
-                  <c:v>4.63</c:v>
+                  <c:v>4.5999999999999996</c:v>
                 </c:pt>
                 <c:pt idx="12">
-                  <c:v>4.28</c:v>
+                  <c:v>4.3</c:v>
                 </c:pt>
                 <c:pt idx="13">
-                  <c:v>4.0599999999999996</c:v>
+                  <c:v>4.0999999999999996</c:v>
                 </c:pt>
                 <c:pt idx="14">
-                  <c:v>3.85</c:v>
+                  <c:v>3.9</c:v>
                 </c:pt>
               </c:numCache>
             </c:numRef>
@@ -3841,7 +3876,7 @@
           <c:smooth val="0"/>
           <c:extLst>
             <c:ext xmlns:c16="http://schemas.microsoft.com/office/drawing/2014/chart" uri="{C3380CC4-5D6E-409C-BE32-E72D297353CC}">
-              <c16:uniqueId val="{00000000-AFBC-4C9A-904A-724DDE23E402}"/>
+              <c16:uniqueId val="{00000000-79B1-4374-912E-4BFF6424D4F7}"/>
             </c:ext>
           </c:extLst>
         </c:ser>
@@ -3939,54 +3974,54 @@
           </c:cat>
           <c:val>
             <c:numRef>
-              <c:f>Race!$C$2:$C$16</c:f>
+              <c:f>Race!$C$18:$C$32</c:f>
               <c:numCache>
                 <c:formatCode>General</c:formatCode>
                 <c:ptCount val="15"/>
                 <c:pt idx="0">
-                  <c:v>6.02</c:v>
+                  <c:v>6.7</c:v>
                 </c:pt>
                 <c:pt idx="1">
-                  <c:v>5.74</c:v>
+                  <c:v>6.6</c:v>
                 </c:pt>
                 <c:pt idx="2">
-                  <c:v>5.0599999999999996</c:v>
+                  <c:v>6</c:v>
                 </c:pt>
                 <c:pt idx="3">
-                  <c:v>5.2</c:v>
+                  <c:v>6.1</c:v>
                 </c:pt>
                 <c:pt idx="4">
-                  <c:v>5.29</c:v>
+                  <c:v>6.3</c:v>
                 </c:pt>
                 <c:pt idx="5">
-                  <c:v>5.47</c:v>
+                  <c:v>6.5</c:v>
                 </c:pt>
                 <c:pt idx="6">
-                  <c:v>5.6</c:v>
+                  <c:v>6.6</c:v>
                 </c:pt>
                 <c:pt idx="7">
-                  <c:v>7.04</c:v>
+                  <c:v>7</c:v>
                 </c:pt>
                 <c:pt idx="8">
-                  <c:v>7.66</c:v>
+                  <c:v>7.7</c:v>
                 </c:pt>
                 <c:pt idx="9">
-                  <c:v>8.01</c:v>
+                  <c:v>8</c:v>
                 </c:pt>
                 <c:pt idx="10">
-                  <c:v>8.33</c:v>
+                  <c:v>8.3000000000000007</c:v>
                 </c:pt>
                 <c:pt idx="11">
-                  <c:v>8.98</c:v>
+                  <c:v>9</c:v>
                 </c:pt>
                 <c:pt idx="12">
-                  <c:v>8.4499999999999993</c:v>
+                  <c:v>8.5</c:v>
                 </c:pt>
                 <c:pt idx="13">
-                  <c:v>8.39</c:v>
+                  <c:v>8.4</c:v>
                 </c:pt>
                 <c:pt idx="14">
-                  <c:v>8.1300000000000008</c:v>
+                  <c:v>8.1</c:v>
                 </c:pt>
               </c:numCache>
             </c:numRef>
@@ -3994,7 +4029,7 @@
           <c:smooth val="0"/>
           <c:extLst>
             <c:ext xmlns:c16="http://schemas.microsoft.com/office/drawing/2014/chart" uri="{C3380CC4-5D6E-409C-BE32-E72D297353CC}">
-              <c16:uniqueId val="{00000001-AFBC-4C9A-904A-724DDE23E402}"/>
+              <c16:uniqueId val="{00000001-79B1-4374-912E-4BFF6424D4F7}"/>
             </c:ext>
           </c:extLst>
         </c:ser>
@@ -4092,54 +4127,54 @@
           </c:cat>
           <c:val>
             <c:numRef>
-              <c:f>Race!$D$2:$D$16</c:f>
+              <c:f>Race!$D$18:$D$32</c:f>
               <c:numCache>
                 <c:formatCode>General</c:formatCode>
                 <c:ptCount val="15"/>
                 <c:pt idx="0">
-                  <c:v>2.33</c:v>
+                  <c:v>2.4</c:v>
                 </c:pt>
                 <c:pt idx="1">
-                  <c:v>2.1800000000000002</c:v>
+                  <c:v>2.5</c:v>
                 </c:pt>
                 <c:pt idx="2">
-                  <c:v>1.89</c:v>
+                  <c:v>2.1</c:v>
                 </c:pt>
                 <c:pt idx="3">
+                  <c:v>2.5</c:v>
+                </c:pt>
+                <c:pt idx="4">
                   <c:v>1.9</c:v>
                 </c:pt>
-                <c:pt idx="4">
-                  <c:v>1.62</c:v>
-                </c:pt>
                 <c:pt idx="5">
-                  <c:v>1.95</c:v>
+                  <c:v>2.4</c:v>
                 </c:pt>
                 <c:pt idx="6">
-                  <c:v>2.11</c:v>
+                  <c:v>2.5</c:v>
                 </c:pt>
                 <c:pt idx="7">
-                  <c:v>2.27</c:v>
+                  <c:v>2.2999999999999998</c:v>
                 </c:pt>
                 <c:pt idx="8">
-                  <c:v>2.78</c:v>
+                  <c:v>2.8</c:v>
                 </c:pt>
                 <c:pt idx="9">
-                  <c:v>2.76</c:v>
+                  <c:v>2.8</c:v>
                 </c:pt>
                 <c:pt idx="10">
-                  <c:v>2.86</c:v>
+                  <c:v>2.9</c:v>
                 </c:pt>
                 <c:pt idx="11">
-                  <c:v>3.23</c:v>
+                  <c:v>3.2</c:v>
                 </c:pt>
                 <c:pt idx="12">
-                  <c:v>2.79</c:v>
+                  <c:v>2.8</c:v>
                 </c:pt>
                 <c:pt idx="13">
-                  <c:v>2.48</c:v>
+                  <c:v>2.5</c:v>
                 </c:pt>
                 <c:pt idx="14">
-                  <c:v>2.64</c:v>
+                  <c:v>2.6</c:v>
                 </c:pt>
               </c:numCache>
             </c:numRef>
@@ -4147,7 +4182,7 @@
           <c:smooth val="0"/>
           <c:extLst>
             <c:ext xmlns:c16="http://schemas.microsoft.com/office/drawing/2014/chart" uri="{C3380CC4-5D6E-409C-BE32-E72D297353CC}">
-              <c16:uniqueId val="{00000002-AFBC-4C9A-904A-724DDE23E402}"/>
+              <c16:uniqueId val="{00000002-79B1-4374-912E-4BFF6424D4F7}"/>
             </c:ext>
           </c:extLst>
         </c:ser>
@@ -4168,7 +4203,7 @@
           <c:spPr>
             <a:ln w="44450" cap="rnd">
               <a:solidFill>
-                <a:schemeClr val="accent4"/>
+                <a:srgbClr val="FFC000"/>
               </a:solidFill>
               <a:round/>
             </a:ln>
@@ -4245,45 +4280,45 @@
           </c:cat>
           <c:val>
             <c:numRef>
-              <c:f>Race!$E$2:$E$16</c:f>
+              <c:f>Race!$E$18:$E$32</c:f>
               <c:numCache>
                 <c:formatCode>General</c:formatCode>
                 <c:ptCount val="15"/>
                 <c:pt idx="0">
-                  <c:v>1.94</c:v>
+                  <c:v>2.5</c:v>
                 </c:pt>
                 <c:pt idx="1">
-                  <c:v>1.82</c:v>
+                  <c:v>2.8</c:v>
                 </c:pt>
                 <c:pt idx="2">
-                  <c:v>2.66</c:v>
+                  <c:v>2.8</c:v>
                 </c:pt>
                 <c:pt idx="3">
-                  <c:v>2.5499999999999998</c:v>
+                  <c:v>3.1</c:v>
                 </c:pt>
                 <c:pt idx="4">
-                  <c:v>2.59</c:v>
+                  <c:v>3.1</c:v>
                 </c:pt>
                 <c:pt idx="5">
-                  <c:v>2.74</c:v>
+                  <c:v>3.2</c:v>
                 </c:pt>
                 <c:pt idx="6">
-                  <c:v>2.71</c:v>
+                  <c:v>3.3</c:v>
                 </c:pt>
                 <c:pt idx="7">
-                  <c:v>3.55</c:v>
+                  <c:v>3.6</c:v>
                 </c:pt>
                 <c:pt idx="8">
                   <c:v>4.0999999999999996</c:v>
                 </c:pt>
                 <c:pt idx="9">
-                  <c:v>4.13</c:v>
+                  <c:v>4.0999999999999996</c:v>
                 </c:pt>
                 <c:pt idx="10">
-                  <c:v>4.29</c:v>
+                  <c:v>4.3</c:v>
                 </c:pt>
                 <c:pt idx="11">
-                  <c:v>5.09</c:v>
+                  <c:v>5.0999999999999996</c:v>
                 </c:pt>
                 <c:pt idx="12">
                   <c:v>4.5999999999999996</c:v>
@@ -4292,7 +4327,7 @@
                   <c:v>4.7</c:v>
                 </c:pt>
                 <c:pt idx="14">
-                  <c:v>4.3600000000000003</c:v>
+                  <c:v>4.4000000000000004</c:v>
                 </c:pt>
               </c:numCache>
             </c:numRef>
@@ -4300,7 +4335,7 @@
           <c:smooth val="0"/>
           <c:extLst>
             <c:ext xmlns:c16="http://schemas.microsoft.com/office/drawing/2014/chart" uri="{C3380CC4-5D6E-409C-BE32-E72D297353CC}">
-              <c16:uniqueId val="{00000003-AFBC-4C9A-904A-724DDE23E402}"/>
+              <c16:uniqueId val="{00000003-79B1-4374-912E-4BFF6424D4F7}"/>
             </c:ext>
           </c:extLst>
         </c:ser>
@@ -4321,7 +4356,7 @@
           <c:spPr>
             <a:ln w="44450" cap="rnd">
               <a:solidFill>
-                <a:schemeClr val="accent5"/>
+                <a:srgbClr val="70AD47"/>
               </a:solidFill>
               <a:round/>
             </a:ln>
@@ -4332,11 +4367,11 @@
             <c:size val="5"/>
             <c:spPr>
               <a:solidFill>
-                <a:schemeClr val="accent5"/>
+                <a:srgbClr val="70AD47"/>
               </a:solidFill>
               <a:ln w="9525">
                 <a:solidFill>
-                  <a:schemeClr val="accent5"/>
+                  <a:srgbClr val="70AD47"/>
                 </a:solidFill>
               </a:ln>
               <a:effectLst/>
@@ -4398,54 +4433,54 @@
           </c:cat>
           <c:val>
             <c:numRef>
-              <c:f>Race!$F$2:$F$16</c:f>
+              <c:f>Race!$F$18:$F$32</c:f>
               <c:numCache>
                 <c:formatCode>General</c:formatCode>
                 <c:ptCount val="15"/>
                 <c:pt idx="0">
-                  <c:v>1.96</c:v>
+                  <c:v>2.1</c:v>
                 </c:pt>
                 <c:pt idx="1">
-                  <c:v>1.87</c:v>
+                  <c:v>2.1</c:v>
                 </c:pt>
                 <c:pt idx="2">
-                  <c:v>1.4</c:v>
+                  <c:v>1.8</c:v>
                 </c:pt>
                 <c:pt idx="3">
-                  <c:v>2.09</c:v>
+                  <c:v>2.2000000000000002</c:v>
                 </c:pt>
                 <c:pt idx="4">
-                  <c:v>2.02</c:v>
+                  <c:v>2.1</c:v>
                 </c:pt>
                 <c:pt idx="5">
-                  <c:v>2.12</c:v>
+                  <c:v>2.1</c:v>
                 </c:pt>
                 <c:pt idx="6">
-                  <c:v>2.31</c:v>
+                  <c:v>2.2000000000000002</c:v>
                 </c:pt>
                 <c:pt idx="7">
-                  <c:v>2.34</c:v>
+                  <c:v>2.2999999999999998</c:v>
                 </c:pt>
                 <c:pt idx="8">
-                  <c:v>2.81</c:v>
+                  <c:v>2.8</c:v>
                 </c:pt>
                 <c:pt idx="9">
-                  <c:v>2.77</c:v>
+                  <c:v>2.8</c:v>
                 </c:pt>
                 <c:pt idx="10">
-                  <c:v>2.83</c:v>
+                  <c:v>2.8</c:v>
                 </c:pt>
                 <c:pt idx="11">
-                  <c:v>3.11</c:v>
+                  <c:v>3.1</c:v>
                 </c:pt>
                 <c:pt idx="12">
-                  <c:v>2.99</c:v>
+                  <c:v>3</c:v>
                 </c:pt>
                 <c:pt idx="13">
-                  <c:v>3.05</c:v>
+                  <c:v>3.1</c:v>
                 </c:pt>
                 <c:pt idx="14">
-                  <c:v>3.12</c:v>
+                  <c:v>3.1</c:v>
                 </c:pt>
               </c:numCache>
             </c:numRef>
@@ -4453,325 +4488,13 @@
           <c:smooth val="0"/>
           <c:extLst>
             <c:ext xmlns:c16="http://schemas.microsoft.com/office/drawing/2014/chart" uri="{C3380CC4-5D6E-409C-BE32-E72D297353CC}">
-              <c16:uniqueId val="{00000004-AFBC-4C9A-904A-724DDE23E402}"/>
-            </c:ext>
-          </c:extLst>
-        </c:ser>
-        <c:ser>
-          <c:idx val="5"/>
-          <c:order val="5"/>
-          <c:tx>
-            <c:strRef>
-              <c:f>Race!$G$1</c:f>
-              <c:strCache>
-                <c:ptCount val="1"/>
-                <c:pt idx="0">
-                  <c:v>Unknown</c:v>
-                </c:pt>
-              </c:strCache>
-            </c:strRef>
-          </c:tx>
-          <c:spPr>
-            <a:ln w="44450" cap="rnd">
-              <a:solidFill>
-                <a:schemeClr val="accent6"/>
-              </a:solidFill>
-              <a:round/>
-            </a:ln>
-            <a:effectLst/>
-          </c:spPr>
-          <c:marker>
-            <c:symbol val="circle"/>
-            <c:size val="5"/>
-            <c:spPr>
-              <a:solidFill>
-                <a:schemeClr val="accent6"/>
-              </a:solidFill>
-              <a:ln w="9525">
-                <a:solidFill>
-                  <a:schemeClr val="accent6"/>
-                </a:solidFill>
-              </a:ln>
-              <a:effectLst/>
-            </c:spPr>
-          </c:marker>
-          <c:cat>
-            <c:numRef>
-              <c:f>Race!$A$2:$A$16</c:f>
-              <c:numCache>
-                <c:formatCode>General</c:formatCode>
-                <c:ptCount val="15"/>
-                <c:pt idx="0">
-                  <c:v>2009</c:v>
-                </c:pt>
-                <c:pt idx="1">
-                  <c:v>2010</c:v>
-                </c:pt>
-                <c:pt idx="2">
-                  <c:v>2011</c:v>
-                </c:pt>
-                <c:pt idx="3">
-                  <c:v>2012</c:v>
-                </c:pt>
-                <c:pt idx="4">
-                  <c:v>2013</c:v>
-                </c:pt>
-                <c:pt idx="5">
-                  <c:v>2014</c:v>
-                </c:pt>
-                <c:pt idx="6">
-                  <c:v>2015</c:v>
-                </c:pt>
-                <c:pt idx="7">
-                  <c:v>2016</c:v>
-                </c:pt>
-                <c:pt idx="8">
-                  <c:v>2017</c:v>
-                </c:pt>
-                <c:pt idx="9">
-                  <c:v>2018</c:v>
-                </c:pt>
-                <c:pt idx="10">
-                  <c:v>2019</c:v>
-                </c:pt>
-                <c:pt idx="11">
-                  <c:v>2020</c:v>
-                </c:pt>
-                <c:pt idx="12">
-                  <c:v>2021</c:v>
-                </c:pt>
-                <c:pt idx="13">
-                  <c:v>2022</c:v>
-                </c:pt>
-                <c:pt idx="14">
-                  <c:v>2023</c:v>
-                </c:pt>
-              </c:numCache>
-            </c:numRef>
-          </c:cat>
-          <c:val>
-            <c:numRef>
-              <c:f>Race!$G$2:$G$16</c:f>
-              <c:numCache>
-                <c:formatCode>General</c:formatCode>
-                <c:ptCount val="15"/>
-                <c:pt idx="0">
-                  <c:v>18.32</c:v>
-                </c:pt>
-                <c:pt idx="1">
-                  <c:v>18.149999999999999</c:v>
-                </c:pt>
-                <c:pt idx="2">
-                  <c:v>17.34</c:v>
-                </c:pt>
-                <c:pt idx="3">
-                  <c:v>17.559999999999999</c:v>
-                </c:pt>
-                <c:pt idx="4">
-                  <c:v>16.739999999999998</c:v>
-                </c:pt>
-                <c:pt idx="5">
-                  <c:v>16.54</c:v>
-                </c:pt>
-                <c:pt idx="6">
-                  <c:v>15.72</c:v>
-                </c:pt>
-                <c:pt idx="7">
-                  <c:v>14.35</c:v>
-                </c:pt>
-                <c:pt idx="8">
-                  <c:v>12.97</c:v>
-                </c:pt>
-                <c:pt idx="9">
-                  <c:v>10.69</c:v>
-                </c:pt>
-                <c:pt idx="10">
-                  <c:v>9.59</c:v>
-                </c:pt>
-                <c:pt idx="11">
-                  <c:v>9.34</c:v>
-                </c:pt>
-                <c:pt idx="12">
-                  <c:v>7.56</c:v>
-                </c:pt>
-                <c:pt idx="13">
-                  <c:v>6.62</c:v>
-                </c:pt>
-                <c:pt idx="14">
-                  <c:v>5.69</c:v>
-                </c:pt>
-              </c:numCache>
-            </c:numRef>
-          </c:val>
-          <c:smooth val="0"/>
-          <c:extLst>
-            <c:ext xmlns:c16="http://schemas.microsoft.com/office/drawing/2014/chart" uri="{C3380CC4-5D6E-409C-BE32-E72D297353CC}">
-              <c16:uniqueId val="{00000005-AFBC-4C9A-904A-724DDE23E402}"/>
-            </c:ext>
-          </c:extLst>
-        </c:ser>
-        <c:ser>
-          <c:idx val="6"/>
-          <c:order val="6"/>
-          <c:tx>
-            <c:strRef>
-              <c:f>Race!$H$1</c:f>
-              <c:strCache>
-                <c:ptCount val="1"/>
-                <c:pt idx="0">
-                  <c:v>Missing</c:v>
-                </c:pt>
-              </c:strCache>
-            </c:strRef>
-          </c:tx>
-          <c:spPr>
-            <a:ln w="44450" cap="rnd">
-              <a:solidFill>
-                <a:schemeClr val="accent1">
-                  <a:lumMod val="60000"/>
-                </a:schemeClr>
-              </a:solidFill>
-              <a:round/>
-            </a:ln>
-            <a:effectLst/>
-          </c:spPr>
-          <c:marker>
-            <c:symbol val="circle"/>
-            <c:size val="5"/>
-            <c:spPr>
-              <a:solidFill>
-                <a:schemeClr val="accent1">
-                  <a:lumMod val="60000"/>
-                </a:schemeClr>
-              </a:solidFill>
-              <a:ln w="9525">
-                <a:solidFill>
-                  <a:schemeClr val="accent1">
-                    <a:lumMod val="60000"/>
-                  </a:schemeClr>
-                </a:solidFill>
-              </a:ln>
-              <a:effectLst/>
-            </c:spPr>
-          </c:marker>
-          <c:cat>
-            <c:numRef>
-              <c:f>Race!$A$2:$A$16</c:f>
-              <c:numCache>
-                <c:formatCode>General</c:formatCode>
-                <c:ptCount val="15"/>
-                <c:pt idx="0">
-                  <c:v>2009</c:v>
-                </c:pt>
-                <c:pt idx="1">
-                  <c:v>2010</c:v>
-                </c:pt>
-                <c:pt idx="2">
-                  <c:v>2011</c:v>
-                </c:pt>
-                <c:pt idx="3">
-                  <c:v>2012</c:v>
-                </c:pt>
-                <c:pt idx="4">
-                  <c:v>2013</c:v>
-                </c:pt>
-                <c:pt idx="5">
-                  <c:v>2014</c:v>
-                </c:pt>
-                <c:pt idx="6">
-                  <c:v>2015</c:v>
-                </c:pt>
-                <c:pt idx="7">
-                  <c:v>2016</c:v>
-                </c:pt>
-                <c:pt idx="8">
-                  <c:v>2017</c:v>
-                </c:pt>
-                <c:pt idx="9">
-                  <c:v>2018</c:v>
-                </c:pt>
-                <c:pt idx="10">
-                  <c:v>2019</c:v>
-                </c:pt>
-                <c:pt idx="11">
-                  <c:v>2020</c:v>
-                </c:pt>
-                <c:pt idx="12">
-                  <c:v>2021</c:v>
-                </c:pt>
-                <c:pt idx="13">
-                  <c:v>2022</c:v>
-                </c:pt>
-                <c:pt idx="14">
-                  <c:v>2023</c:v>
-                </c:pt>
-              </c:numCache>
-            </c:numRef>
-          </c:cat>
-          <c:val>
-            <c:numRef>
-              <c:f>Race!$H$2:$H$16</c:f>
-              <c:numCache>
-                <c:formatCode>General</c:formatCode>
-                <c:ptCount val="15"/>
-                <c:pt idx="0">
-                  <c:v>8.06</c:v>
-                </c:pt>
-                <c:pt idx="1">
-                  <c:v>7.53</c:v>
-                </c:pt>
-                <c:pt idx="2">
-                  <c:v>6.95</c:v>
-                </c:pt>
-                <c:pt idx="3">
-                  <c:v>6.77</c:v>
-                </c:pt>
-                <c:pt idx="4">
-                  <c:v>6.34</c:v>
-                </c:pt>
-                <c:pt idx="5">
-                  <c:v>6.1</c:v>
-                </c:pt>
-                <c:pt idx="6">
-                  <c:v>5.89</c:v>
-                </c:pt>
-                <c:pt idx="7">
-                  <c:v>6.01</c:v>
-                </c:pt>
-                <c:pt idx="8">
-                  <c:v>6.61</c:v>
-                </c:pt>
-                <c:pt idx="9">
-                  <c:v>6.67</c:v>
-                </c:pt>
-                <c:pt idx="10">
-                  <c:v>6.85</c:v>
-                </c:pt>
-                <c:pt idx="11">
-                  <c:v>7.34</c:v>
-                </c:pt>
-                <c:pt idx="12">
-                  <c:v>6.48</c:v>
-                </c:pt>
-                <c:pt idx="13">
-                  <c:v>6.4</c:v>
-                </c:pt>
-                <c:pt idx="14">
-                  <c:v>5.87</c:v>
-                </c:pt>
-              </c:numCache>
-            </c:numRef>
-          </c:val>
-          <c:smooth val="0"/>
-          <c:extLst>
-            <c:ext xmlns:c16="http://schemas.microsoft.com/office/drawing/2014/chart" uri="{C3380CC4-5D6E-409C-BE32-E72D297353CC}">
-              <c16:uniqueId val="{00000006-AFBC-4C9A-904A-724DDE23E402}"/>
+              <c16:uniqueId val="{00000004-79B1-4374-912E-4BFF6424D4F7}"/>
             </c:ext>
           </c:extLst>
         </c:ser>
         <c:ser>
           <c:idx val="7"/>
-          <c:order val="7"/>
+          <c:order val="5"/>
           <c:tx>
             <c:strRef>
               <c:f>Race!$I$1</c:f>
@@ -4864,54 +4587,54 @@
           </c:cat>
           <c:val>
             <c:numRef>
-              <c:f>Race!$I$2:$I$16</c:f>
+              <c:f>Race!$I$18:$I$32</c:f>
               <c:numCache>
                 <c:formatCode>General</c:formatCode>
                 <c:ptCount val="15"/>
                 <c:pt idx="0">
-                  <c:v>6.35</c:v>
+                  <c:v>5.9</c:v>
                 </c:pt>
                 <c:pt idx="1">
-                  <c:v>5.99</c:v>
+                  <c:v>6</c:v>
                 </c:pt>
                 <c:pt idx="2">
-                  <c:v>5.29</c:v>
+                  <c:v>5.4</c:v>
                 </c:pt>
                 <c:pt idx="3">
-                  <c:v>5.31</c:v>
+                  <c:v>5.4</c:v>
                 </c:pt>
                 <c:pt idx="4">
-                  <c:v>5.0599999999999996</c:v>
+                  <c:v>5.0999999999999996</c:v>
                 </c:pt>
                 <c:pt idx="5">
-                  <c:v>5.03</c:v>
+                  <c:v>5.0999999999999996</c:v>
                 </c:pt>
                 <c:pt idx="6">
-                  <c:v>4.91</c:v>
+                  <c:v>4.9000000000000004</c:v>
                 </c:pt>
                 <c:pt idx="7">
-                  <c:v>5.09</c:v>
+                  <c:v>5.0999999999999996</c:v>
                 </c:pt>
                 <c:pt idx="8">
-                  <c:v>5.46</c:v>
+                  <c:v>5.5</c:v>
                 </c:pt>
                 <c:pt idx="9">
-                  <c:v>5.45</c:v>
+                  <c:v>5.5</c:v>
                 </c:pt>
                 <c:pt idx="10">
-                  <c:v>5.45</c:v>
+                  <c:v>5.5</c:v>
                 </c:pt>
                 <c:pt idx="11">
-                  <c:v>5.89</c:v>
+                  <c:v>5.9</c:v>
                 </c:pt>
                 <c:pt idx="12">
-                  <c:v>5.37</c:v>
+                  <c:v>5.4</c:v>
                 </c:pt>
                 <c:pt idx="13">
-                  <c:v>5.14</c:v>
+                  <c:v>5.0999999999999996</c:v>
                 </c:pt>
                 <c:pt idx="14">
-                  <c:v>4.84</c:v>
+                  <c:v>4.8</c:v>
                 </c:pt>
               </c:numCache>
             </c:numRef>
@@ -4919,7 +4642,7 @@
           <c:smooth val="0"/>
           <c:extLst>
             <c:ext xmlns:c16="http://schemas.microsoft.com/office/drawing/2014/chart" uri="{C3380CC4-5D6E-409C-BE32-E72D297353CC}">
-              <c16:uniqueId val="{00000007-AFBC-4C9A-904A-724DDE23E402}"/>
+              <c16:uniqueId val="{00000005-79B1-4374-912E-4BFF6424D4F7}"/>
             </c:ext>
           </c:extLst>
         </c:ser>
@@ -4965,7 +4688,7 @@
           <a:lstStyle/>
           <a:p>
             <a:pPr>
-              <a:defRPr sz="2000" b="0" i="0" u="none" strike="noStrike" kern="1200" baseline="0">
+              <a:defRPr sz="2400" b="0" i="0" u="none" strike="noStrike" kern="1200" baseline="0">
                 <a:solidFill>
                   <a:schemeClr val="tx1"/>
                 </a:solidFill>
@@ -4989,6 +4712,7 @@
         <c:axId val="624155968"/>
         <c:scaling>
           <c:orientation val="minMax"/>
+          <c:max val="15"/>
         </c:scaling>
         <c:delete val="0"/>
         <c:axPos val="l"/>
@@ -5013,7 +4737,7 @@
               <a:lstStyle/>
               <a:p>
                 <a:pPr>
-                  <a:defRPr sz="2000" b="0" i="0" u="none" strike="noStrike" kern="1200" baseline="0">
+                  <a:defRPr sz="2400" b="0" i="0" u="none" strike="noStrike" kern="1200" baseline="0">
                     <a:solidFill>
                       <a:schemeClr val="tx1"/>
                     </a:solidFill>
@@ -5023,8 +4747,8 @@
                   </a:defRPr>
                 </a:pPr>
                 <a:r>
-                  <a:rPr lang="en-US"/>
-                  <a:t>CKD (%)</a:t>
+                  <a:rPr lang="en-US" dirty="0"/>
+                  <a:t>CKD Stages 3-5 (%)</a:t>
                 </a:r>
               </a:p>
             </c:rich>
@@ -5042,7 +4766,7 @@
             <a:lstStyle/>
             <a:p>
               <a:pPr>
-                <a:defRPr sz="2000" b="0" i="0" u="none" strike="noStrike" kern="1200" baseline="0">
+                <a:defRPr sz="2400" b="0" i="0" u="none" strike="noStrike" kern="1200" baseline="0">
                   <a:solidFill>
                     <a:schemeClr val="tx1"/>
                   </a:solidFill>
@@ -5071,7 +4795,7 @@
           <a:lstStyle/>
           <a:p>
             <a:pPr>
-              <a:defRPr sz="2000" b="0" i="0" u="none" strike="noStrike" kern="1200" baseline="0">
+              <a:defRPr sz="2400" b="0" i="0" u="none" strike="noStrike" kern="1200" baseline="0">
                 <a:solidFill>
                   <a:schemeClr val="tx1"/>
                 </a:solidFill>
@@ -5101,9 +4825,9 @@
         <c:manualLayout>
           <c:xMode val="edge"/>
           <c:yMode val="edge"/>
-          <c:x val="2.4279243661596419E-2"/>
-          <c:y val="0.7278122308500613"/>
-          <c:w val="0.97213807200811231"/>
+          <c:x val="8.0839895013123356E-4"/>
+          <c:y val="0.72922287839020128"/>
+          <c:w val="0.99560883639545061"/>
           <c:h val="0.23240858649024876"/>
         </c:manualLayout>
       </c:layout>
@@ -5120,7 +4844,7 @@
         <a:lstStyle/>
         <a:p>
           <a:pPr>
-            <a:defRPr sz="2000" b="0" i="0" u="none" strike="noStrike" kern="1200" baseline="0">
+            <a:defRPr sz="2400" b="0" i="0" u="none" strike="noStrike" kern="1200" baseline="0">
               <a:solidFill>
                 <a:schemeClr val="tx1"/>
               </a:solidFill>
@@ -5156,7 +4880,7 @@
     <a:lstStyle/>
     <a:p>
       <a:pPr>
-        <a:defRPr sz="2000">
+        <a:defRPr sz="2400">
           <a:solidFill>
             <a:schemeClr val="tx1"/>
           </a:solidFill>
@@ -5187,17 +4911,7 @@
   <c:chart>
     <c:autoTitleDeleted val="1"/>
     <c:plotArea>
-      <c:layout>
-        <c:manualLayout>
-          <c:layoutTarget val="inner"/>
-          <c:xMode val="edge"/>
-          <c:yMode val="edge"/>
-          <c:x val="7.4156605424321953E-2"/>
-          <c:y val="4.7798556430446192E-2"/>
-          <c:w val="0.91362117235345586"/>
-          <c:h val="0.58054899387576553"/>
-        </c:manualLayout>
-      </c:layout>
+      <c:layout/>
       <c:lineChart>
         <c:grouping val="standard"/>
         <c:varyColors val="0"/>
@@ -5295,54 +5009,54 @@
           </c:cat>
           <c:val>
             <c:numRef>
-              <c:f>Race!$B$35:$B$49</c:f>
+              <c:f>Race!$B$51:$B$65</c:f>
               <c:numCache>
-                <c:formatCode>0.00</c:formatCode>
+                <c:formatCode>0.0</c:formatCode>
                 <c:ptCount val="15"/>
                 <c:pt idx="0">
-                  <c:v>5.3789999999999996</c:v>
+                  <c:v>5.7</c:v>
                 </c:pt>
                 <c:pt idx="1">
-                  <c:v>5.2914000000000003</c:v>
+                  <c:v>5.8</c:v>
                 </c:pt>
                 <c:pt idx="2">
-                  <c:v>4.7263000000000002</c:v>
+                  <c:v>5.3</c:v>
                 </c:pt>
                 <c:pt idx="3">
-                  <c:v>4.8186</c:v>
+                  <c:v>5.4</c:v>
                 </c:pt>
                 <c:pt idx="4">
-                  <c:v>4.3982999999999999</c:v>
+                  <c:v>5</c:v>
                 </c:pt>
                 <c:pt idx="5">
-                  <c:v>4.2804000000000002</c:v>
+                  <c:v>4.9000000000000004</c:v>
                 </c:pt>
                 <c:pt idx="6">
-                  <c:v>4.0106000000000002</c:v>
+                  <c:v>4.7</c:v>
                 </c:pt>
                 <c:pt idx="7">
-                  <c:v>4.9126099999999999</c:v>
+                  <c:v>4.9000000000000004</c:v>
                 </c:pt>
                 <c:pt idx="8">
-                  <c:v>5.1886000000000001</c:v>
+                  <c:v>5.2</c:v>
                 </c:pt>
                 <c:pt idx="9">
-                  <c:v>5.1706000000000003</c:v>
+                  <c:v>5.2</c:v>
                 </c:pt>
                 <c:pt idx="10">
-                  <c:v>5.2178000000000004</c:v>
+                  <c:v>5.2</c:v>
                 </c:pt>
                 <c:pt idx="11">
-                  <c:v>5.4554999999999998</c:v>
+                  <c:v>5.5</c:v>
                 </c:pt>
                 <c:pt idx="12">
-                  <c:v>5.1063999999999998</c:v>
+                  <c:v>5.0999999999999996</c:v>
                 </c:pt>
                 <c:pt idx="13">
-                  <c:v>4.8822000000000001</c:v>
+                  <c:v>4.9000000000000004</c:v>
                 </c:pt>
                 <c:pt idx="14">
-                  <c:v>4.6311499999999999</c:v>
+                  <c:v>4.5999999999999996</c:v>
                 </c:pt>
               </c:numCache>
             </c:numRef>
@@ -5350,7 +5064,7 @@
           <c:smooth val="0"/>
           <c:extLst>
             <c:ext xmlns:c16="http://schemas.microsoft.com/office/drawing/2014/chart" uri="{C3380CC4-5D6E-409C-BE32-E72D297353CC}">
-              <c16:uniqueId val="{00000000-FB3C-49B2-B659-F358465DF407}"/>
+              <c16:uniqueId val="{00000000-F067-4DA8-B0C2-E5815162C739}"/>
             </c:ext>
           </c:extLst>
         </c:ser>
@@ -5448,54 +5162,54 @@
           </c:cat>
           <c:val>
             <c:numRef>
-              <c:f>Race!$C$35:$C$49</c:f>
+              <c:f>Race!$C$51:$C$65</c:f>
               <c:numCache>
-                <c:formatCode>0.00</c:formatCode>
+                <c:formatCode>0.0</c:formatCode>
                 <c:ptCount val="15"/>
                 <c:pt idx="0">
-                  <c:v>11.224299999999999</c:v>
+                  <c:v>11.2</c:v>
                 </c:pt>
                 <c:pt idx="1">
-                  <c:v>10.861800000000001</c:v>
+                  <c:v>11</c:v>
                 </c:pt>
                 <c:pt idx="2">
-                  <c:v>9.9619</c:v>
+                  <c:v>10.199999999999999</c:v>
                 </c:pt>
                 <c:pt idx="3">
-                  <c:v>9.7691999999999997</c:v>
+                  <c:v>10</c:v>
                 </c:pt>
                 <c:pt idx="4">
-                  <c:v>9.5635999999999992</c:v>
+                  <c:v>9.6999999999999993</c:v>
                 </c:pt>
                 <c:pt idx="5">
-                  <c:v>9.1774000000000004</c:v>
+                  <c:v>9.6</c:v>
                 </c:pt>
                 <c:pt idx="6">
-                  <c:v>9.0079999999999991</c:v>
+                  <c:v>9.5</c:v>
                 </c:pt>
                 <c:pt idx="7">
-                  <c:v>9.8073599999999992</c:v>
+                  <c:v>9.8000000000000007</c:v>
                 </c:pt>
                 <c:pt idx="8">
-                  <c:v>10.3193</c:v>
+                  <c:v>10.3</c:v>
                 </c:pt>
                 <c:pt idx="9">
-                  <c:v>10.2988</c:v>
+                  <c:v>10.3</c:v>
                 </c:pt>
                 <c:pt idx="10">
-                  <c:v>10.511699999999999</c:v>
+                  <c:v>10.5</c:v>
                 </c:pt>
                 <c:pt idx="11">
-                  <c:v>10.8665</c:v>
+                  <c:v>10.9</c:v>
                 </c:pt>
                 <c:pt idx="12">
-                  <c:v>10.257099999999999</c:v>
+                  <c:v>10.3</c:v>
                 </c:pt>
                 <c:pt idx="13">
-                  <c:v>10.0213</c:v>
+                  <c:v>10</c:v>
                 </c:pt>
                 <c:pt idx="14">
-                  <c:v>9.6009700000000002</c:v>
+                  <c:v>9.6</c:v>
                 </c:pt>
               </c:numCache>
             </c:numRef>
@@ -5503,7 +5217,7 @@
           <c:smooth val="0"/>
           <c:extLst>
             <c:ext xmlns:c16="http://schemas.microsoft.com/office/drawing/2014/chart" uri="{C3380CC4-5D6E-409C-BE32-E72D297353CC}">
-              <c16:uniqueId val="{00000001-FB3C-49B2-B659-F358465DF407}"/>
+              <c16:uniqueId val="{00000001-F067-4DA8-B0C2-E5815162C739}"/>
             </c:ext>
           </c:extLst>
         </c:ser>
@@ -5601,54 +5315,54 @@
           </c:cat>
           <c:val>
             <c:numRef>
-              <c:f>Race!$D$35:$D$49</c:f>
+              <c:f>Race!$D$51:$D$65</c:f>
               <c:numCache>
-                <c:formatCode>0.00</c:formatCode>
+                <c:formatCode>0.0</c:formatCode>
                 <c:ptCount val="15"/>
                 <c:pt idx="0">
-                  <c:v>8.2446000000000002</c:v>
+                  <c:v>6.5</c:v>
                 </c:pt>
                 <c:pt idx="1">
-                  <c:v>7.3756000000000004</c:v>
+                  <c:v>6.6</c:v>
                 </c:pt>
                 <c:pt idx="2">
-                  <c:v>6.5332999999999997</c:v>
+                  <c:v>5.4</c:v>
                 </c:pt>
                 <c:pt idx="3">
-                  <c:v>6.3152999999999997</c:v>
+                  <c:v>5.8</c:v>
                 </c:pt>
                 <c:pt idx="4">
-                  <c:v>4.5522</c:v>
+                  <c:v>3.9</c:v>
                 </c:pt>
                 <c:pt idx="5">
-                  <c:v>5.8334999999999999</c:v>
+                  <c:v>5.0999999999999996</c:v>
                 </c:pt>
                 <c:pt idx="6">
-                  <c:v>5.2461000000000002</c:v>
+                  <c:v>5.2</c:v>
                 </c:pt>
                 <c:pt idx="7">
-                  <c:v>4.6267100000000001</c:v>
+                  <c:v>4.5999999999999996</c:v>
                 </c:pt>
                 <c:pt idx="8">
-                  <c:v>4.9843999999999999</c:v>
+                  <c:v>5</c:v>
                 </c:pt>
                 <c:pt idx="9">
-                  <c:v>5.0637999999999996</c:v>
+                  <c:v>5.0999999999999996</c:v>
                 </c:pt>
                 <c:pt idx="10">
-                  <c:v>5.2355999999999998</c:v>
+                  <c:v>5.2</c:v>
                 </c:pt>
                 <c:pt idx="11">
-                  <c:v>5.6412000000000004</c:v>
+                  <c:v>5.6</c:v>
                 </c:pt>
                 <c:pt idx="12">
-                  <c:v>5.1456</c:v>
+                  <c:v>5.2</c:v>
                 </c:pt>
                 <c:pt idx="13">
-                  <c:v>4.6851000000000003</c:v>
+                  <c:v>4.7</c:v>
                 </c:pt>
                 <c:pt idx="14">
-                  <c:v>4.7377200000000004</c:v>
+                  <c:v>4.7</c:v>
                 </c:pt>
               </c:numCache>
             </c:numRef>
@@ -5656,7 +5370,7 @@
           <c:smooth val="0"/>
           <c:extLst>
             <c:ext xmlns:c16="http://schemas.microsoft.com/office/drawing/2014/chart" uri="{C3380CC4-5D6E-409C-BE32-E72D297353CC}">
-              <c16:uniqueId val="{00000002-FB3C-49B2-B659-F358465DF407}"/>
+              <c16:uniqueId val="{00000002-F067-4DA8-B0C2-E5815162C739}"/>
             </c:ext>
           </c:extLst>
         </c:ser>
@@ -5754,54 +5468,54 @@
           </c:cat>
           <c:val>
             <c:numRef>
-              <c:f>Race!$E$35:$E$49</c:f>
+              <c:f>Race!$E$51:$E$65</c:f>
               <c:numCache>
-                <c:formatCode>0.00</c:formatCode>
+                <c:formatCode>0.0</c:formatCode>
                 <c:ptCount val="15"/>
                 <c:pt idx="0">
-                  <c:v>5.3920000000000003</c:v>
+                  <c:v>4.8</c:v>
                 </c:pt>
                 <c:pt idx="1">
-                  <c:v>4.7298999999999998</c:v>
+                  <c:v>4.8</c:v>
                 </c:pt>
                 <c:pt idx="2">
-                  <c:v>4.8811</c:v>
+                  <c:v>4.3</c:v>
                 </c:pt>
                 <c:pt idx="3">
-                  <c:v>4.8291000000000004</c:v>
+                  <c:v>4.5</c:v>
                 </c:pt>
                 <c:pt idx="4">
-                  <c:v>4.6619999999999999</c:v>
+                  <c:v>4.3</c:v>
                 </c:pt>
                 <c:pt idx="5">
-                  <c:v>4.5696000000000003</c:v>
+                  <c:v>4.0999999999999996</c:v>
                 </c:pt>
                 <c:pt idx="6">
-                  <c:v>4.3022999999999998</c:v>
+                  <c:v>4</c:v>
                 </c:pt>
                 <c:pt idx="7">
-                  <c:v>4.1359000000000004</c:v>
+                  <c:v>4.0999999999999996</c:v>
                 </c:pt>
                 <c:pt idx="8">
-                  <c:v>4.5370999999999997</c:v>
+                  <c:v>4.5</c:v>
                 </c:pt>
                 <c:pt idx="9">
-                  <c:v>4.4714999999999998</c:v>
+                  <c:v>4.5</c:v>
                 </c:pt>
                 <c:pt idx="10">
-                  <c:v>4.6349999999999998</c:v>
+                  <c:v>4.5999999999999996</c:v>
                 </c:pt>
                 <c:pt idx="11">
-                  <c:v>5.0343</c:v>
+                  <c:v>5</c:v>
                 </c:pt>
                 <c:pt idx="12">
-                  <c:v>4.5232000000000001</c:v>
+                  <c:v>4.5</c:v>
                 </c:pt>
                 <c:pt idx="13">
-                  <c:v>4.5663999999999998</c:v>
+                  <c:v>4.5999999999999996</c:v>
                 </c:pt>
                 <c:pt idx="14">
-                  <c:v>4.2195999999999998</c:v>
+                  <c:v>4.2</c:v>
                 </c:pt>
               </c:numCache>
             </c:numRef>
@@ -5809,7 +5523,7 @@
           <c:smooth val="0"/>
           <c:extLst>
             <c:ext xmlns:c16="http://schemas.microsoft.com/office/drawing/2014/chart" uri="{C3380CC4-5D6E-409C-BE32-E72D297353CC}">
-              <c16:uniqueId val="{00000003-FB3C-49B2-B659-F358465DF407}"/>
+              <c16:uniqueId val="{00000003-F067-4DA8-B0C2-E5815162C739}"/>
             </c:ext>
           </c:extLst>
         </c:ser>
@@ -5830,7 +5544,7 @@
           <c:spPr>
             <a:ln w="44450" cap="rnd">
               <a:solidFill>
-                <a:schemeClr val="accent5"/>
+                <a:srgbClr val="70AD47"/>
               </a:solidFill>
               <a:round/>
             </a:ln>
@@ -5841,11 +5555,11 @@
             <c:size val="5"/>
             <c:spPr>
               <a:solidFill>
-                <a:schemeClr val="accent5"/>
+                <a:srgbClr val="70AD47"/>
               </a:solidFill>
               <a:ln w="9525">
                 <a:solidFill>
-                  <a:schemeClr val="accent5"/>
+                  <a:srgbClr val="70AD47"/>
                 </a:solidFill>
               </a:ln>
               <a:effectLst/>
@@ -5907,54 +5621,54 @@
           </c:cat>
           <c:val>
             <c:numRef>
-              <c:f>Race!$F$35:$F$49</c:f>
+              <c:f>Race!$F$51:$F$65</c:f>
               <c:numCache>
-                <c:formatCode>0.00</c:formatCode>
+                <c:formatCode>0.0</c:formatCode>
                 <c:ptCount val="15"/>
                 <c:pt idx="0">
-                  <c:v>5.5498000000000003</c:v>
+                  <c:v>5.9</c:v>
                 </c:pt>
                 <c:pt idx="1">
-                  <c:v>5.6863999999999999</c:v>
+                  <c:v>6.4</c:v>
                 </c:pt>
                 <c:pt idx="2">
-                  <c:v>4.4279000000000002</c:v>
+                  <c:v>5.2</c:v>
                 </c:pt>
                 <c:pt idx="3">
-                  <c:v>5.2304000000000004</c:v>
+                  <c:v>5.8</c:v>
                 </c:pt>
                 <c:pt idx="4">
-                  <c:v>4.5232999999999999</c:v>
+                  <c:v>5.0999999999999996</c:v>
                 </c:pt>
                 <c:pt idx="5">
-                  <c:v>4.4039000000000001</c:v>
+                  <c:v>5</c:v>
                 </c:pt>
                 <c:pt idx="6">
-                  <c:v>4.5072999999999999</c:v>
+                  <c:v>5.0999999999999996</c:v>
                 </c:pt>
                 <c:pt idx="7">
-                  <c:v>4.7231300000000003</c:v>
+                  <c:v>4.7</c:v>
                 </c:pt>
                 <c:pt idx="8">
-                  <c:v>5.4154</c:v>
+                  <c:v>5.4</c:v>
                 </c:pt>
                 <c:pt idx="9">
-                  <c:v>4.8250000000000002</c:v>
+                  <c:v>4.8</c:v>
                 </c:pt>
                 <c:pt idx="10">
-                  <c:v>4.9592000000000001</c:v>
+                  <c:v>5</c:v>
                 </c:pt>
                 <c:pt idx="11">
-                  <c:v>4.9008000000000003</c:v>
+                  <c:v>4.9000000000000004</c:v>
                 </c:pt>
                 <c:pt idx="12">
-                  <c:v>4.2469000000000001</c:v>
+                  <c:v>4.3</c:v>
                 </c:pt>
                 <c:pt idx="13">
-                  <c:v>4.2591999999999999</c:v>
+                  <c:v>4.3</c:v>
                 </c:pt>
                 <c:pt idx="14">
-                  <c:v>4.0045999999999999</c:v>
+                  <c:v>4</c:v>
                 </c:pt>
               </c:numCache>
             </c:numRef>
@@ -5962,325 +5676,13 @@
           <c:smooth val="0"/>
           <c:extLst>
             <c:ext xmlns:c16="http://schemas.microsoft.com/office/drawing/2014/chart" uri="{C3380CC4-5D6E-409C-BE32-E72D297353CC}">
-              <c16:uniqueId val="{00000004-FB3C-49B2-B659-F358465DF407}"/>
-            </c:ext>
-          </c:extLst>
-        </c:ser>
-        <c:ser>
-          <c:idx val="5"/>
-          <c:order val="5"/>
-          <c:tx>
-            <c:strRef>
-              <c:f>Race!$G$34</c:f>
-              <c:strCache>
-                <c:ptCount val="1"/>
-                <c:pt idx="0">
-                  <c:v>Unknown</c:v>
-                </c:pt>
-              </c:strCache>
-            </c:strRef>
-          </c:tx>
-          <c:spPr>
-            <a:ln w="44450" cap="rnd">
-              <a:solidFill>
-                <a:schemeClr val="accent6"/>
-              </a:solidFill>
-              <a:round/>
-            </a:ln>
-            <a:effectLst/>
-          </c:spPr>
-          <c:marker>
-            <c:symbol val="circle"/>
-            <c:size val="5"/>
-            <c:spPr>
-              <a:solidFill>
-                <a:schemeClr val="accent6"/>
-              </a:solidFill>
-              <a:ln w="9525">
-                <a:solidFill>
-                  <a:schemeClr val="accent6"/>
-                </a:solidFill>
-              </a:ln>
-              <a:effectLst/>
-            </c:spPr>
-          </c:marker>
-          <c:cat>
-            <c:numRef>
-              <c:f>Race!$A$35:$A$49</c:f>
-              <c:numCache>
-                <c:formatCode>General</c:formatCode>
-                <c:ptCount val="15"/>
-                <c:pt idx="0">
-                  <c:v>2009</c:v>
-                </c:pt>
-                <c:pt idx="1">
-                  <c:v>2010</c:v>
-                </c:pt>
-                <c:pt idx="2">
-                  <c:v>2011</c:v>
-                </c:pt>
-                <c:pt idx="3">
-                  <c:v>2012</c:v>
-                </c:pt>
-                <c:pt idx="4">
-                  <c:v>2013</c:v>
-                </c:pt>
-                <c:pt idx="5">
-                  <c:v>2014</c:v>
-                </c:pt>
-                <c:pt idx="6">
-                  <c:v>2015</c:v>
-                </c:pt>
-                <c:pt idx="7">
-                  <c:v>2016</c:v>
-                </c:pt>
-                <c:pt idx="8">
-                  <c:v>2017</c:v>
-                </c:pt>
-                <c:pt idx="9">
-                  <c:v>2018</c:v>
-                </c:pt>
-                <c:pt idx="10">
-                  <c:v>2019</c:v>
-                </c:pt>
-                <c:pt idx="11">
-                  <c:v>2020</c:v>
-                </c:pt>
-                <c:pt idx="12">
-                  <c:v>2021</c:v>
-                </c:pt>
-                <c:pt idx="13">
-                  <c:v>2022</c:v>
-                </c:pt>
-                <c:pt idx="14">
-                  <c:v>2023</c:v>
-                </c:pt>
-              </c:numCache>
-            </c:numRef>
-          </c:cat>
-          <c:val>
-            <c:numRef>
-              <c:f>Race!$G$35:$G$49</c:f>
-              <c:numCache>
-                <c:formatCode>0.00</c:formatCode>
-                <c:ptCount val="15"/>
-                <c:pt idx="0">
-                  <c:v>8.0868000000000002</c:v>
-                </c:pt>
-                <c:pt idx="1">
-                  <c:v>7.9604999999999997</c:v>
-                </c:pt>
-                <c:pt idx="2">
-                  <c:v>7.3796999999999997</c:v>
-                </c:pt>
-                <c:pt idx="3">
-                  <c:v>7.5159000000000002</c:v>
-                </c:pt>
-                <c:pt idx="4">
-                  <c:v>7.0904999999999996</c:v>
-                </c:pt>
-                <c:pt idx="5">
-                  <c:v>6.8556999999999997</c:v>
-                </c:pt>
-                <c:pt idx="6">
-                  <c:v>6.7378999999999998</c:v>
-                </c:pt>
-                <c:pt idx="7">
-                  <c:v>6.93506</c:v>
-                </c:pt>
-                <c:pt idx="8">
-                  <c:v>7.1970000000000001</c:v>
-                </c:pt>
-                <c:pt idx="9">
-                  <c:v>6.992</c:v>
-                </c:pt>
-                <c:pt idx="10">
-                  <c:v>7.2601000000000004</c:v>
-                </c:pt>
-                <c:pt idx="11">
-                  <c:v>7.2850999999999999</c:v>
-                </c:pt>
-                <c:pt idx="12">
-                  <c:v>6.8247999999999998</c:v>
-                </c:pt>
-                <c:pt idx="13">
-                  <c:v>6.4903000000000004</c:v>
-                </c:pt>
-                <c:pt idx="14">
-                  <c:v>6.0958300000000003</c:v>
-                </c:pt>
-              </c:numCache>
-            </c:numRef>
-          </c:val>
-          <c:smooth val="0"/>
-          <c:extLst>
-            <c:ext xmlns:c16="http://schemas.microsoft.com/office/drawing/2014/chart" uri="{C3380CC4-5D6E-409C-BE32-E72D297353CC}">
-              <c16:uniqueId val="{00000005-FB3C-49B2-B659-F358465DF407}"/>
-            </c:ext>
-          </c:extLst>
-        </c:ser>
-        <c:ser>
-          <c:idx val="6"/>
-          <c:order val="6"/>
-          <c:tx>
-            <c:strRef>
-              <c:f>Race!$H$34</c:f>
-              <c:strCache>
-                <c:ptCount val="1"/>
-                <c:pt idx="0">
-                  <c:v>Missing</c:v>
-                </c:pt>
-              </c:strCache>
-            </c:strRef>
-          </c:tx>
-          <c:spPr>
-            <a:ln w="44450" cap="rnd">
-              <a:solidFill>
-                <a:schemeClr val="accent1">
-                  <a:lumMod val="60000"/>
-                </a:schemeClr>
-              </a:solidFill>
-              <a:round/>
-            </a:ln>
-            <a:effectLst/>
-          </c:spPr>
-          <c:marker>
-            <c:symbol val="circle"/>
-            <c:size val="5"/>
-            <c:spPr>
-              <a:solidFill>
-                <a:schemeClr val="accent1">
-                  <a:lumMod val="60000"/>
-                </a:schemeClr>
-              </a:solidFill>
-              <a:ln w="9525">
-                <a:solidFill>
-                  <a:schemeClr val="accent1">
-                    <a:lumMod val="60000"/>
-                  </a:schemeClr>
-                </a:solidFill>
-              </a:ln>
-              <a:effectLst/>
-            </c:spPr>
-          </c:marker>
-          <c:cat>
-            <c:numRef>
-              <c:f>Race!$A$35:$A$49</c:f>
-              <c:numCache>
-                <c:formatCode>General</c:formatCode>
-                <c:ptCount val="15"/>
-                <c:pt idx="0">
-                  <c:v>2009</c:v>
-                </c:pt>
-                <c:pt idx="1">
-                  <c:v>2010</c:v>
-                </c:pt>
-                <c:pt idx="2">
-                  <c:v>2011</c:v>
-                </c:pt>
-                <c:pt idx="3">
-                  <c:v>2012</c:v>
-                </c:pt>
-                <c:pt idx="4">
-                  <c:v>2013</c:v>
-                </c:pt>
-                <c:pt idx="5">
-                  <c:v>2014</c:v>
-                </c:pt>
-                <c:pt idx="6">
-                  <c:v>2015</c:v>
-                </c:pt>
-                <c:pt idx="7">
-                  <c:v>2016</c:v>
-                </c:pt>
-                <c:pt idx="8">
-                  <c:v>2017</c:v>
-                </c:pt>
-                <c:pt idx="9">
-                  <c:v>2018</c:v>
-                </c:pt>
-                <c:pt idx="10">
-                  <c:v>2019</c:v>
-                </c:pt>
-                <c:pt idx="11">
-                  <c:v>2020</c:v>
-                </c:pt>
-                <c:pt idx="12">
-                  <c:v>2021</c:v>
-                </c:pt>
-                <c:pt idx="13">
-                  <c:v>2022</c:v>
-                </c:pt>
-                <c:pt idx="14">
-                  <c:v>2023</c:v>
-                </c:pt>
-              </c:numCache>
-            </c:numRef>
-          </c:cat>
-          <c:val>
-            <c:numRef>
-              <c:f>Race!$H$35:$H$49</c:f>
-              <c:numCache>
-                <c:formatCode>0.00</c:formatCode>
-                <c:ptCount val="15"/>
-                <c:pt idx="0">
-                  <c:v>7.6837999999999997</c:v>
-                </c:pt>
-                <c:pt idx="1">
-                  <c:v>7.4047999999999998</c:v>
-                </c:pt>
-                <c:pt idx="2">
-                  <c:v>6.8075000000000001</c:v>
-                </c:pt>
-                <c:pt idx="3">
-                  <c:v>6.8959999999999999</c:v>
-                </c:pt>
-                <c:pt idx="4">
-                  <c:v>6.4771999999999998</c:v>
-                </c:pt>
-                <c:pt idx="5">
-                  <c:v>6.3354999999999997</c:v>
-                </c:pt>
-                <c:pt idx="6">
-                  <c:v>6.093</c:v>
-                </c:pt>
-                <c:pt idx="7">
-                  <c:v>6.2904</c:v>
-                </c:pt>
-                <c:pt idx="8">
-                  <c:v>6.4851999999999999</c:v>
-                </c:pt>
-                <c:pt idx="9">
-                  <c:v>6.3296999999999999</c:v>
-                </c:pt>
-                <c:pt idx="10">
-                  <c:v>6.3521000000000001</c:v>
-                </c:pt>
-                <c:pt idx="11">
-                  <c:v>6.4013999999999998</c:v>
-                </c:pt>
-                <c:pt idx="12">
-                  <c:v>5.7504999999999997</c:v>
-                </c:pt>
-                <c:pt idx="13">
-                  <c:v>5.3978000000000002</c:v>
-                </c:pt>
-                <c:pt idx="14">
-                  <c:v>4.8428199999999997</c:v>
-                </c:pt>
-              </c:numCache>
-            </c:numRef>
-          </c:val>
-          <c:smooth val="0"/>
-          <c:extLst>
-            <c:ext xmlns:c16="http://schemas.microsoft.com/office/drawing/2014/chart" uri="{C3380CC4-5D6E-409C-BE32-E72D297353CC}">
-              <c16:uniqueId val="{00000006-FB3C-49B2-B659-F358465DF407}"/>
+              <c16:uniqueId val="{00000004-F067-4DA8-B0C2-E5815162C739}"/>
             </c:ext>
           </c:extLst>
         </c:ser>
         <c:ser>
           <c:idx val="7"/>
-          <c:order val="7"/>
+          <c:order val="5"/>
           <c:tx>
             <c:strRef>
               <c:f>Race!$I$34</c:f>
@@ -6373,54 +5775,54 @@
           </c:cat>
           <c:val>
             <c:numRef>
-              <c:f>Race!$I$35:$I$49</c:f>
+              <c:f>Race!$I$51:$I$65</c:f>
               <c:numCache>
-                <c:formatCode>0.00</c:formatCode>
+                <c:formatCode>0.0</c:formatCode>
                 <c:ptCount val="15"/>
                 <c:pt idx="0">
-                  <c:v>7.97</c:v>
+                  <c:v>7.7</c:v>
                 </c:pt>
                 <c:pt idx="1">
-                  <c:v>7.62</c:v>
+                  <c:v>7.6</c:v>
                 </c:pt>
                 <c:pt idx="2">
                   <c:v>7</c:v>
                 </c:pt>
                 <c:pt idx="3">
-                  <c:v>7.02</c:v>
+                  <c:v>7</c:v>
                 </c:pt>
                 <c:pt idx="4">
-                  <c:v>6.56</c:v>
+                  <c:v>6.5</c:v>
                 </c:pt>
                 <c:pt idx="5">
-                  <c:v>6.36</c:v>
+                  <c:v>6.3</c:v>
                 </c:pt>
                 <c:pt idx="6">
-                  <c:v>6.09</c:v>
+                  <c:v>6</c:v>
                 </c:pt>
                 <c:pt idx="7">
-                  <c:v>6.19</c:v>
+                  <c:v>6.2</c:v>
                 </c:pt>
                 <c:pt idx="8">
-                  <c:v>6.45</c:v>
+                  <c:v>6.5</c:v>
                 </c:pt>
                 <c:pt idx="9">
-                  <c:v>6.39</c:v>
+                  <c:v>6.4</c:v>
                 </c:pt>
                 <c:pt idx="10">
-                  <c:v>6.46</c:v>
+                  <c:v>6.5</c:v>
                 </c:pt>
                 <c:pt idx="11">
-                  <c:v>6.63</c:v>
+                  <c:v>6.6</c:v>
                 </c:pt>
                 <c:pt idx="12">
-                  <c:v>6.16</c:v>
+                  <c:v>6.2</c:v>
                 </c:pt>
                 <c:pt idx="13">
-                  <c:v>5.91</c:v>
+                  <c:v>5.9</c:v>
                 </c:pt>
                 <c:pt idx="14">
-                  <c:v>5.58</c:v>
+                  <c:v>5.6</c:v>
                 </c:pt>
               </c:numCache>
             </c:numRef>
@@ -6428,7 +5830,7 @@
           <c:smooth val="0"/>
           <c:extLst>
             <c:ext xmlns:c16="http://schemas.microsoft.com/office/drawing/2014/chart" uri="{C3380CC4-5D6E-409C-BE32-E72D297353CC}">
-              <c16:uniqueId val="{00000007-FB3C-49B2-B659-F358465DF407}"/>
+              <c16:uniqueId val="{00000005-F067-4DA8-B0C2-E5815162C739}"/>
             </c:ext>
           </c:extLst>
         </c:ser>
@@ -6474,7 +5876,7 @@
           <a:lstStyle/>
           <a:p>
             <a:pPr>
-              <a:defRPr sz="2000" b="0" i="0" u="none" strike="noStrike" kern="1200" baseline="0">
+              <a:defRPr sz="2400" b="0" i="0" u="none" strike="noStrike" kern="1200" baseline="0">
                 <a:solidFill>
                   <a:schemeClr val="tx1"/>
                 </a:solidFill>
@@ -6498,7 +5900,7 @@
         <c:axId val="626185056"/>
         <c:scaling>
           <c:orientation val="minMax"/>
-          <c:max val="20"/>
+          <c:max val="15"/>
         </c:scaling>
         <c:delete val="0"/>
         <c:axPos val="l"/>
@@ -6523,7 +5925,7 @@
               <a:lstStyle/>
               <a:p>
                 <a:pPr>
-                  <a:defRPr sz="2000" b="0" i="0" u="none" strike="noStrike" kern="1200" baseline="0">
+                  <a:defRPr sz="2400" b="0" i="0" u="none" strike="noStrike" kern="1200" baseline="0">
                     <a:solidFill>
                       <a:schemeClr val="tx1"/>
                     </a:solidFill>
@@ -6533,8 +5935,8 @@
                   </a:defRPr>
                 </a:pPr>
                 <a:r>
-                  <a:rPr lang="en-US"/>
-                  <a:t>CKD (%)</a:t>
+                  <a:rPr lang="en-US" dirty="0"/>
+                  <a:t>CKD Stages 3-5 (%)</a:t>
                 </a:r>
               </a:p>
             </c:rich>
@@ -6552,7 +5954,7 @@
             <a:lstStyle/>
             <a:p>
               <a:pPr>
-                <a:defRPr sz="2000" b="0" i="0" u="none" strike="noStrike" kern="1200" baseline="0">
+                <a:defRPr sz="2400" b="0" i="0" u="none" strike="noStrike" kern="1200" baseline="0">
                   <a:solidFill>
                     <a:schemeClr val="tx1"/>
                   </a:solidFill>
@@ -6581,7 +5983,7 @@
           <a:lstStyle/>
           <a:p>
             <a:pPr>
-              <a:defRPr sz="2000" b="0" i="0" u="none" strike="noStrike" kern="1200" baseline="0">
+              <a:defRPr sz="2400" b="0" i="0" u="none" strike="noStrike" kern="1200" baseline="0">
                 <a:solidFill>
                   <a:schemeClr val="tx1"/>
                 </a:solidFill>
@@ -6611,10 +6013,10 @@
         <c:manualLayout>
           <c:xMode val="edge"/>
           <c:yMode val="edge"/>
-          <c:x val="3.0438670166229226E-2"/>
-          <c:y val="0.73004680664916877"/>
-          <c:w val="0.9424559930008749"/>
-          <c:h val="0.25328652668416446"/>
+          <c:x val="1.5328083989501313E-3"/>
+          <c:y val="0.72081627296587913"/>
+          <c:w val="0.99846719160104991"/>
+          <c:h val="0.22918372703412074"/>
         </c:manualLayout>
       </c:layout>
       <c:overlay val="0"/>
@@ -6630,7 +6032,7 @@
         <a:lstStyle/>
         <a:p>
           <a:pPr>
-            <a:defRPr sz="2000" b="0" i="0" u="none" strike="noStrike" kern="1200" baseline="0">
+            <a:defRPr sz="2400" b="0" i="0" u="none" strike="noStrike" kern="1200" baseline="0">
               <a:solidFill>
                 <a:schemeClr val="tx1"/>
               </a:solidFill>
@@ -6666,7 +6068,7 @@
     <a:lstStyle/>
     <a:p>
       <a:pPr>
-        <a:defRPr sz="2000">
+        <a:defRPr sz="2400">
           <a:solidFill>
             <a:schemeClr val="tx1"/>
           </a:solidFill>
@@ -10840,7 +10242,7 @@
           <a:p>
             <a:fld id="{5BA7D939-328E-4FDC-8520-F2EE74C8E8C4}" type="datetimeFigureOut">
               <a:rPr lang="en-US" smtClean="0"/>
-              <a:t>10/6/2025</a:t>
+              <a:t>12/23/2025</a:t>
             </a:fld>
             <a:endParaRPr lang="en-US"/>
           </a:p>
@@ -11048,7 +10450,7 @@
           <a:p>
             <a:fld id="{5BA7D939-328E-4FDC-8520-F2EE74C8E8C4}" type="datetimeFigureOut">
               <a:rPr lang="en-US" smtClean="0"/>
-              <a:t>10/6/2025</a:t>
+              <a:t>12/23/2025</a:t>
             </a:fld>
             <a:endParaRPr lang="en-US"/>
           </a:p>
@@ -11257,7 +10659,7 @@
           <a:p>
             <a:fld id="{5BA7D939-328E-4FDC-8520-F2EE74C8E8C4}" type="datetimeFigureOut">
               <a:rPr lang="en-US" smtClean="0"/>
-              <a:t>10/6/2025</a:t>
+              <a:t>12/23/2025</a:t>
             </a:fld>
             <a:endParaRPr lang="en-US"/>
           </a:p>
@@ -11572,7 +10974,7 @@
           <a:p>
             <a:fld id="{5BA7D939-328E-4FDC-8520-F2EE74C8E8C4}" type="datetimeFigureOut">
               <a:rPr lang="en-US" smtClean="0"/>
-              <a:t>10/6/2025</a:t>
+              <a:t>12/23/2025</a:t>
             </a:fld>
             <a:endParaRPr lang="en-US"/>
           </a:p>
@@ -11878,7 +11280,7 @@
           <a:p>
             <a:fld id="{5BA7D939-328E-4FDC-8520-F2EE74C8E8C4}" type="datetimeFigureOut">
               <a:rPr lang="en-US" smtClean="0"/>
-              <a:t>10/6/2025</a:t>
+              <a:t>12/23/2025</a:t>
             </a:fld>
             <a:endParaRPr lang="en-US"/>
           </a:p>
@@ -12326,7 +11728,7 @@
           <a:p>
             <a:fld id="{5BA7D939-328E-4FDC-8520-F2EE74C8E8C4}" type="datetimeFigureOut">
               <a:rPr lang="en-US" smtClean="0"/>
-              <a:t>10/6/2025</a:t>
+              <a:t>12/23/2025</a:t>
             </a:fld>
             <a:endParaRPr lang="en-US"/>
           </a:p>
@@ -12508,7 +11910,7 @@
           <a:p>
             <a:fld id="{5BA7D939-328E-4FDC-8520-F2EE74C8E8C4}" type="datetimeFigureOut">
               <a:rPr lang="en-US" smtClean="0"/>
-              <a:t>10/6/2025</a:t>
+              <a:t>12/23/2025</a:t>
             </a:fld>
             <a:endParaRPr lang="en-US"/>
           </a:p>
@@ -12657,7 +12059,7 @@
           <a:p>
             <a:fld id="{5BA7D939-328E-4FDC-8520-F2EE74C8E8C4}" type="datetimeFigureOut">
               <a:rPr lang="en-US" smtClean="0"/>
-              <a:t>10/6/2025</a:t>
+              <a:t>12/23/2025</a:t>
             </a:fld>
             <a:endParaRPr lang="en-US"/>
           </a:p>
@@ -13005,7 +12407,7 @@
           <a:p>
             <a:fld id="{5BA7D939-328E-4FDC-8520-F2EE74C8E8C4}" type="datetimeFigureOut">
               <a:rPr lang="en-US" smtClean="0"/>
-              <a:t>10/6/2025</a:t>
+              <a:t>12/23/2025</a:t>
             </a:fld>
             <a:endParaRPr lang="en-US"/>
           </a:p>
@@ -13333,7 +12735,7 @@
           <a:p>
             <a:fld id="{5BA7D939-328E-4FDC-8520-F2EE74C8E8C4}" type="datetimeFigureOut">
               <a:rPr lang="en-US" smtClean="0"/>
-              <a:t>10/6/2025</a:t>
+              <a:t>12/23/2025</a:t>
             </a:fld>
             <a:endParaRPr lang="en-US"/>
           </a:p>
@@ -13611,7 +13013,7 @@
           <a:p>
             <a:fld id="{5BA7D939-328E-4FDC-8520-F2EE74C8E8C4}" type="datetimeFigureOut">
               <a:rPr lang="en-US" smtClean="0"/>
-              <a:t>10/6/2025</a:t>
+              <a:t>12/23/2025</a:t>
             </a:fld>
             <a:endParaRPr lang="en-US"/>
           </a:p>
@@ -14301,7 +13703,7 @@
       </p:sp>
       <p:graphicFrame>
         <p:nvGraphicFramePr>
-          <p:cNvPr id="7" name="Chart 6">
+          <p:cNvPr id="4" name="Chart 3">
             <a:extLst>
               <a:ext uri="{FF2B5EF4-FFF2-40B4-BE49-F238E27FC236}">
                 <a16:creationId xmlns:a16="http://schemas.microsoft.com/office/drawing/2014/main" id="{4FC3E75F-0767-423E-840B-295016064A45}"/>
@@ -14314,7 +13716,7 @@
           <p:nvPr>
             <p:extLst>
               <p:ext uri="{D42A27DB-BD31-4B8C-83A1-F6EECF244321}">
-                <p14:modId xmlns:p14="http://schemas.microsoft.com/office/powerpoint/2010/main" val="3946918982"/>
+                <p14:modId xmlns:p14="http://schemas.microsoft.com/office/powerpoint/2010/main" val="1331611922"/>
               </p:ext>
             </p:extLst>
           </p:nvPr>
@@ -14396,7 +13798,7 @@
       </p:sp>
       <p:graphicFrame>
         <p:nvGraphicFramePr>
-          <p:cNvPr id="7" name="Chart 6">
+          <p:cNvPr id="4" name="Chart 3">
             <a:extLst>
               <a:ext uri="{FF2B5EF4-FFF2-40B4-BE49-F238E27FC236}">
                 <a16:creationId xmlns:a16="http://schemas.microsoft.com/office/drawing/2014/main" id="{38F00509-39FA-4CC4-8AFB-00F057F94135}"/>
@@ -14409,7 +13811,7 @@
           <p:nvPr>
             <p:extLst>
               <p:ext uri="{D42A27DB-BD31-4B8C-83A1-F6EECF244321}">
-                <p14:modId xmlns:p14="http://schemas.microsoft.com/office/powerpoint/2010/main" val="1268856954"/>
+                <p14:modId xmlns:p14="http://schemas.microsoft.com/office/powerpoint/2010/main" val="2125451839"/>
               </p:ext>
             </p:extLst>
           </p:nvPr>
@@ -14491,7 +13893,7 @@
       </p:sp>
       <p:graphicFrame>
         <p:nvGraphicFramePr>
-          <p:cNvPr id="8" name="Chart 7">
+          <p:cNvPr id="4" name="Chart 3">
             <a:extLst>
               <a:ext uri="{FF2B5EF4-FFF2-40B4-BE49-F238E27FC236}">
                 <a16:creationId xmlns:a16="http://schemas.microsoft.com/office/drawing/2014/main" id="{D43D977C-6A16-4F62-BBCD-8C77136611BF}"/>
@@ -14504,7 +13906,7 @@
           <p:nvPr>
             <p:extLst>
               <p:ext uri="{D42A27DB-BD31-4B8C-83A1-F6EECF244321}">
-                <p14:modId xmlns:p14="http://schemas.microsoft.com/office/powerpoint/2010/main" val="735932558"/>
+                <p14:modId xmlns:p14="http://schemas.microsoft.com/office/powerpoint/2010/main" val="2760146555"/>
               </p:ext>
             </p:extLst>
           </p:nvPr>
@@ -14578,7 +13980,7 @@
           <a:lstStyle/>
           <a:p>
             <a:r>
-              <a:rPr lang="en-US"/>
+              <a:rPr lang="en-US" dirty="0"/>
               <a:t>Trends in Prevalence of CKD Stages 3–5 in the Military Health System by Sex, Crude</a:t>
             </a:r>
           </a:p>
@@ -14586,7 +13988,7 @@
       </p:sp>
       <p:graphicFrame>
         <p:nvGraphicFramePr>
-          <p:cNvPr id="7" name="Chart 6">
+          <p:cNvPr id="4" name="Chart 3">
             <a:extLst>
               <a:ext uri="{FF2B5EF4-FFF2-40B4-BE49-F238E27FC236}">
                 <a16:creationId xmlns:a16="http://schemas.microsoft.com/office/drawing/2014/main" id="{11B6EB87-F0C1-4004-8F25-CD4C56EB3CCE}"/>
@@ -14599,7 +14001,7 @@
           <p:nvPr>
             <p:extLst>
               <p:ext uri="{D42A27DB-BD31-4B8C-83A1-F6EECF244321}">
-                <p14:modId xmlns:p14="http://schemas.microsoft.com/office/powerpoint/2010/main" val="402537396"/>
+                <p14:modId xmlns:p14="http://schemas.microsoft.com/office/powerpoint/2010/main" val="702100227"/>
               </p:ext>
             </p:extLst>
           </p:nvPr>
@@ -14681,7 +14083,7 @@
       </p:sp>
       <p:graphicFrame>
         <p:nvGraphicFramePr>
-          <p:cNvPr id="4" name="Chart 3">
+          <p:cNvPr id="5" name="Chart 4">
             <a:extLst>
               <a:ext uri="{FF2B5EF4-FFF2-40B4-BE49-F238E27FC236}">
                 <a16:creationId xmlns:a16="http://schemas.microsoft.com/office/drawing/2014/main" id="{BB79CF89-E759-4922-9ECC-ACF5C7CAE9C8}"/>
@@ -14694,7 +14096,7 @@
           <p:nvPr>
             <p:extLst>
               <p:ext uri="{D42A27DB-BD31-4B8C-83A1-F6EECF244321}">
-                <p14:modId xmlns:p14="http://schemas.microsoft.com/office/powerpoint/2010/main" val="821372754"/>
+                <p14:modId xmlns:p14="http://schemas.microsoft.com/office/powerpoint/2010/main" val="1711267666"/>
               </p:ext>
             </p:extLst>
           </p:nvPr>
@@ -14776,7 +14178,7 @@
       </p:sp>
       <p:graphicFrame>
         <p:nvGraphicFramePr>
-          <p:cNvPr id="6" name="Chart 5">
+          <p:cNvPr id="4" name="Chart 3">
             <a:extLst>
               <a:ext uri="{FF2B5EF4-FFF2-40B4-BE49-F238E27FC236}">
                 <a16:creationId xmlns:a16="http://schemas.microsoft.com/office/drawing/2014/main" id="{B1D8F915-D845-43B8-A9ED-994BED830F15}"/>
@@ -14789,7 +14191,7 @@
           <p:nvPr>
             <p:extLst>
               <p:ext uri="{D42A27DB-BD31-4B8C-83A1-F6EECF244321}">
-                <p14:modId xmlns:p14="http://schemas.microsoft.com/office/powerpoint/2010/main" val="1104006705"/>
+                <p14:modId xmlns:p14="http://schemas.microsoft.com/office/powerpoint/2010/main" val="1312897891"/>
               </p:ext>
             </p:extLst>
           </p:nvPr>
@@ -14858,12 +14260,12 @@
         </p:spPr>
         <p:txBody>
           <a:bodyPr anchor="ctr">
-            <a:normAutofit fontScale="90000"/>
+            <a:normAutofit/>
           </a:bodyPr>
           <a:lstStyle/>
           <a:p>
             <a:r>
-              <a:rPr lang="en-US" sz="4100" dirty="0"/>
+              <a:rPr lang="en-US" sz="3700"/>
               <a:t>Trends in Prevalence of CKD Stages 3–5 in the Military Health System by Race/Ethnicity, Age Standardized</a:t>
             </a:r>
           </a:p>
@@ -14871,7 +14273,7 @@
       </p:sp>
       <p:graphicFrame>
         <p:nvGraphicFramePr>
-          <p:cNvPr id="7" name="Chart 6">
+          <p:cNvPr id="4" name="Chart 3">
             <a:extLst>
               <a:ext uri="{FF2B5EF4-FFF2-40B4-BE49-F238E27FC236}">
                 <a16:creationId xmlns:a16="http://schemas.microsoft.com/office/drawing/2014/main" id="{943E5C6D-0846-4D38-BE5A-7285D8D93552}"/>
@@ -14884,13 +14286,13 @@
           <p:nvPr>
             <p:extLst>
               <p:ext uri="{D42A27DB-BD31-4B8C-83A1-F6EECF244321}">
-                <p14:modId xmlns:p14="http://schemas.microsoft.com/office/powerpoint/2010/main" val="2410769846"/>
+                <p14:modId xmlns:p14="http://schemas.microsoft.com/office/powerpoint/2010/main" val="1271153685"/>
               </p:ext>
             </p:extLst>
           </p:nvPr>
         </p:nvGraphicFramePr>
         <p:xfrm>
-          <a:off x="381000" y="1690688"/>
+          <a:off x="381000" y="1692937"/>
           <a:ext cx="11430000" cy="4572000"/>
         </p:xfrm>
         <a:graphic>

--- a/CKDSurveillance/PPT/Q756.pptx
+++ b/CKDSurveillance/PPT/Q756.pptx
@@ -4195,7 +4195,7 @@
               <c:strCache>
                 <c:ptCount val="1"/>
                 <c:pt idx="0">
-                  <c:v>Asian/Pacific Islander</c:v>
+                  <c:v>Asian American/Pacific Islander</c:v>
                 </c:pt>
               </c:strCache>
             </c:strRef>
@@ -5383,7 +5383,7 @@
               <c:strCache>
                 <c:ptCount val="1"/>
                 <c:pt idx="0">
-                  <c:v>Asian/Pacific Islander</c:v>
+                  <c:v>Asian American/Pacific Islander</c:v>
                 </c:pt>
               </c:strCache>
             </c:strRef>
@@ -10242,7 +10242,7 @@
           <a:p>
             <a:fld id="{5BA7D939-328E-4FDC-8520-F2EE74C8E8C4}" type="datetimeFigureOut">
               <a:rPr lang="en-US" smtClean="0"/>
-              <a:t>12/23/2025</a:t>
+              <a:t>1/6/2026</a:t>
             </a:fld>
             <a:endParaRPr lang="en-US"/>
           </a:p>
@@ -10450,7 +10450,7 @@
           <a:p>
             <a:fld id="{5BA7D939-328E-4FDC-8520-F2EE74C8E8C4}" type="datetimeFigureOut">
               <a:rPr lang="en-US" smtClean="0"/>
-              <a:t>12/23/2025</a:t>
+              <a:t>1/6/2026</a:t>
             </a:fld>
             <a:endParaRPr lang="en-US"/>
           </a:p>
@@ -10659,7 +10659,7 @@
           <a:p>
             <a:fld id="{5BA7D939-328E-4FDC-8520-F2EE74C8E8C4}" type="datetimeFigureOut">
               <a:rPr lang="en-US" smtClean="0"/>
-              <a:t>12/23/2025</a:t>
+              <a:t>1/6/2026</a:t>
             </a:fld>
             <a:endParaRPr lang="en-US"/>
           </a:p>
@@ -10974,7 +10974,7 @@
           <a:p>
             <a:fld id="{5BA7D939-328E-4FDC-8520-F2EE74C8E8C4}" type="datetimeFigureOut">
               <a:rPr lang="en-US" smtClean="0"/>
-              <a:t>12/23/2025</a:t>
+              <a:t>1/6/2026</a:t>
             </a:fld>
             <a:endParaRPr lang="en-US"/>
           </a:p>
@@ -11280,7 +11280,7 @@
           <a:p>
             <a:fld id="{5BA7D939-328E-4FDC-8520-F2EE74C8E8C4}" type="datetimeFigureOut">
               <a:rPr lang="en-US" smtClean="0"/>
-              <a:t>12/23/2025</a:t>
+              <a:t>1/6/2026</a:t>
             </a:fld>
             <a:endParaRPr lang="en-US"/>
           </a:p>
@@ -11728,7 +11728,7 @@
           <a:p>
             <a:fld id="{5BA7D939-328E-4FDC-8520-F2EE74C8E8C4}" type="datetimeFigureOut">
               <a:rPr lang="en-US" smtClean="0"/>
-              <a:t>12/23/2025</a:t>
+              <a:t>1/6/2026</a:t>
             </a:fld>
             <a:endParaRPr lang="en-US"/>
           </a:p>
@@ -11910,7 +11910,7 @@
           <a:p>
             <a:fld id="{5BA7D939-328E-4FDC-8520-F2EE74C8E8C4}" type="datetimeFigureOut">
               <a:rPr lang="en-US" smtClean="0"/>
-              <a:t>12/23/2025</a:t>
+              <a:t>1/6/2026</a:t>
             </a:fld>
             <a:endParaRPr lang="en-US"/>
           </a:p>
@@ -12059,7 +12059,7 @@
           <a:p>
             <a:fld id="{5BA7D939-328E-4FDC-8520-F2EE74C8E8C4}" type="datetimeFigureOut">
               <a:rPr lang="en-US" smtClean="0"/>
-              <a:t>12/23/2025</a:t>
+              <a:t>1/6/2026</a:t>
             </a:fld>
             <a:endParaRPr lang="en-US"/>
           </a:p>
@@ -12407,7 +12407,7 @@
           <a:p>
             <a:fld id="{5BA7D939-328E-4FDC-8520-F2EE74C8E8C4}" type="datetimeFigureOut">
               <a:rPr lang="en-US" smtClean="0"/>
-              <a:t>12/23/2025</a:t>
+              <a:t>1/6/2026</a:t>
             </a:fld>
             <a:endParaRPr lang="en-US"/>
           </a:p>
@@ -12735,7 +12735,7 @@
           <a:p>
             <a:fld id="{5BA7D939-328E-4FDC-8520-F2EE74C8E8C4}" type="datetimeFigureOut">
               <a:rPr lang="en-US" smtClean="0"/>
-              <a:t>12/23/2025</a:t>
+              <a:t>1/6/2026</a:t>
             </a:fld>
             <a:endParaRPr lang="en-US"/>
           </a:p>
@@ -13013,7 +13013,7 @@
           <a:p>
             <a:fld id="{5BA7D939-328E-4FDC-8520-F2EE74C8E8C4}" type="datetimeFigureOut">
               <a:rPr lang="en-US" smtClean="0"/>
-              <a:t>12/23/2025</a:t>
+              <a:t>1/6/2026</a:t>
             </a:fld>
             <a:endParaRPr lang="en-US"/>
           </a:p>
@@ -14191,7 +14191,7 @@
           <p:nvPr>
             <p:extLst>
               <p:ext uri="{D42A27DB-BD31-4B8C-83A1-F6EECF244321}">
-                <p14:modId xmlns:p14="http://schemas.microsoft.com/office/powerpoint/2010/main" val="1312897891"/>
+                <p14:modId xmlns:p14="http://schemas.microsoft.com/office/powerpoint/2010/main" val="274363723"/>
               </p:ext>
             </p:extLst>
           </p:nvPr>
@@ -14286,7 +14286,7 @@
           <p:nvPr>
             <p:extLst>
               <p:ext uri="{D42A27DB-BD31-4B8C-83A1-F6EECF244321}">
-                <p14:modId xmlns:p14="http://schemas.microsoft.com/office/powerpoint/2010/main" val="1271153685"/>
+                <p14:modId xmlns:p14="http://schemas.microsoft.com/office/powerpoint/2010/main" val="2293839170"/>
               </p:ext>
             </p:extLst>
           </p:nvPr>

--- a/CKDSurveillance/PPT/Q756.pptx
+++ b/CKDSurveillance/PPT/Q756.pptx
@@ -4195,7 +4195,7 @@
               <c:strCache>
                 <c:ptCount val="1"/>
                 <c:pt idx="0">
-                  <c:v>Asian American/Pacific Islander</c:v>
+                  <c:v>Asian/Pacific Islander</c:v>
                 </c:pt>
               </c:strCache>
             </c:strRef>
@@ -5383,7 +5383,7 @@
               <c:strCache>
                 <c:ptCount val="1"/>
                 <c:pt idx="0">
-                  <c:v>Asian American/Pacific Islander</c:v>
+                  <c:v>Asian/Pacific Islander</c:v>
                 </c:pt>
               </c:strCache>
             </c:strRef>
@@ -10242,7 +10242,7 @@
           <a:p>
             <a:fld id="{5BA7D939-328E-4FDC-8520-F2EE74C8E8C4}" type="datetimeFigureOut">
               <a:rPr lang="en-US" smtClean="0"/>
-              <a:t>1/6/2026</a:t>
+              <a:t>12/23/2025</a:t>
             </a:fld>
             <a:endParaRPr lang="en-US"/>
           </a:p>
@@ -10450,7 +10450,7 @@
           <a:p>
             <a:fld id="{5BA7D939-328E-4FDC-8520-F2EE74C8E8C4}" type="datetimeFigureOut">
               <a:rPr lang="en-US" smtClean="0"/>
-              <a:t>1/6/2026</a:t>
+              <a:t>12/23/2025</a:t>
             </a:fld>
             <a:endParaRPr lang="en-US"/>
           </a:p>
@@ -10659,7 +10659,7 @@
           <a:p>
             <a:fld id="{5BA7D939-328E-4FDC-8520-F2EE74C8E8C4}" type="datetimeFigureOut">
               <a:rPr lang="en-US" smtClean="0"/>
-              <a:t>1/6/2026</a:t>
+              <a:t>12/23/2025</a:t>
             </a:fld>
             <a:endParaRPr lang="en-US"/>
           </a:p>
@@ -10974,7 +10974,7 @@
           <a:p>
             <a:fld id="{5BA7D939-328E-4FDC-8520-F2EE74C8E8C4}" type="datetimeFigureOut">
               <a:rPr lang="en-US" smtClean="0"/>
-              <a:t>1/6/2026</a:t>
+              <a:t>12/23/2025</a:t>
             </a:fld>
             <a:endParaRPr lang="en-US"/>
           </a:p>
@@ -11280,7 +11280,7 @@
           <a:p>
             <a:fld id="{5BA7D939-328E-4FDC-8520-F2EE74C8E8C4}" type="datetimeFigureOut">
               <a:rPr lang="en-US" smtClean="0"/>
-              <a:t>1/6/2026</a:t>
+              <a:t>12/23/2025</a:t>
             </a:fld>
             <a:endParaRPr lang="en-US"/>
           </a:p>
@@ -11728,7 +11728,7 @@
           <a:p>
             <a:fld id="{5BA7D939-328E-4FDC-8520-F2EE74C8E8C4}" type="datetimeFigureOut">
               <a:rPr lang="en-US" smtClean="0"/>
-              <a:t>1/6/2026</a:t>
+              <a:t>12/23/2025</a:t>
             </a:fld>
             <a:endParaRPr lang="en-US"/>
           </a:p>
@@ -11910,7 +11910,7 @@
           <a:p>
             <a:fld id="{5BA7D939-328E-4FDC-8520-F2EE74C8E8C4}" type="datetimeFigureOut">
               <a:rPr lang="en-US" smtClean="0"/>
-              <a:t>1/6/2026</a:t>
+              <a:t>12/23/2025</a:t>
             </a:fld>
             <a:endParaRPr lang="en-US"/>
           </a:p>
@@ -12059,7 +12059,7 @@
           <a:p>
             <a:fld id="{5BA7D939-328E-4FDC-8520-F2EE74C8E8C4}" type="datetimeFigureOut">
               <a:rPr lang="en-US" smtClean="0"/>
-              <a:t>1/6/2026</a:t>
+              <a:t>12/23/2025</a:t>
             </a:fld>
             <a:endParaRPr lang="en-US"/>
           </a:p>
@@ -12407,7 +12407,7 @@
           <a:p>
             <a:fld id="{5BA7D939-328E-4FDC-8520-F2EE74C8E8C4}" type="datetimeFigureOut">
               <a:rPr lang="en-US" smtClean="0"/>
-              <a:t>1/6/2026</a:t>
+              <a:t>12/23/2025</a:t>
             </a:fld>
             <a:endParaRPr lang="en-US"/>
           </a:p>
@@ -12735,7 +12735,7 @@
           <a:p>
             <a:fld id="{5BA7D939-328E-4FDC-8520-F2EE74C8E8C4}" type="datetimeFigureOut">
               <a:rPr lang="en-US" smtClean="0"/>
-              <a:t>1/6/2026</a:t>
+              <a:t>12/23/2025</a:t>
             </a:fld>
             <a:endParaRPr lang="en-US"/>
           </a:p>
@@ -13013,7 +13013,7 @@
           <a:p>
             <a:fld id="{5BA7D939-328E-4FDC-8520-F2EE74C8E8C4}" type="datetimeFigureOut">
               <a:rPr lang="en-US" smtClean="0"/>
-              <a:t>1/6/2026</a:t>
+              <a:t>12/23/2025</a:t>
             </a:fld>
             <a:endParaRPr lang="en-US"/>
           </a:p>
@@ -14191,7 +14191,7 @@
           <p:nvPr>
             <p:extLst>
               <p:ext uri="{D42A27DB-BD31-4B8C-83A1-F6EECF244321}">
-                <p14:modId xmlns:p14="http://schemas.microsoft.com/office/powerpoint/2010/main" val="274363723"/>
+                <p14:modId xmlns:p14="http://schemas.microsoft.com/office/powerpoint/2010/main" val="1312897891"/>
               </p:ext>
             </p:extLst>
           </p:nvPr>
@@ -14286,7 +14286,7 @@
           <p:nvPr>
             <p:extLst>
               <p:ext uri="{D42A27DB-BD31-4B8C-83A1-F6EECF244321}">
-                <p14:modId xmlns:p14="http://schemas.microsoft.com/office/powerpoint/2010/main" val="2293839170"/>
+                <p14:modId xmlns:p14="http://schemas.microsoft.com/office/powerpoint/2010/main" val="1271153685"/>
               </p:ext>
             </p:extLst>
           </p:nvPr>

--- a/CKDSurveillance/PPT/Q756.pptx
+++ b/CKDSurveillance/PPT/Q756.pptx
@@ -2,17 +2,17 @@
 <file path=ppt/presentation.xml><?xml version="1.0" encoding="utf-8"?>
 <p:presentation xmlns:a="http://schemas.openxmlformats.org/drawingml/2006/main" xmlns:r="http://schemas.openxmlformats.org/officeDocument/2006/relationships" xmlns:p="http://schemas.openxmlformats.org/presentationml/2006/main" saveSubsetFonts="1">
   <p:sldMasterIdLst>
-    <p:sldMasterId id="2147483660" r:id="rId1"/>
+    <p:sldMasterId id="2147483660" r:id="rId4"/>
   </p:sldMasterIdLst>
   <p:sldIdLst>
-    <p:sldId id="256" r:id="rId2"/>
-    <p:sldId id="257" r:id="rId3"/>
-    <p:sldId id="258" r:id="rId4"/>
-    <p:sldId id="259" r:id="rId5"/>
-    <p:sldId id="260" r:id="rId6"/>
-    <p:sldId id="261" r:id="rId7"/>
-    <p:sldId id="262" r:id="rId8"/>
-    <p:sldId id="263" r:id="rId9"/>
+    <p:sldId id="256" r:id="rId5"/>
+    <p:sldId id="257" r:id="rId6"/>
+    <p:sldId id="258" r:id="rId7"/>
+    <p:sldId id="259" r:id="rId8"/>
+    <p:sldId id="260" r:id="rId9"/>
+    <p:sldId id="261" r:id="rId10"/>
+    <p:sldId id="262" r:id="rId11"/>
+    <p:sldId id="263" r:id="rId12"/>
   </p:sldIdLst>
   <p:sldSz cx="12192000" cy="6858000"/>
   <p:notesSz cx="6858000" cy="9144000"/>
@@ -468,6 +468,7 @@
     </c:plotArea>
     <c:plotVisOnly val="1"/>
     <c:dispBlanksAs val="gap"/>
+    <c:showDLblsOverMax val="0"/>
     <c:extLst>
       <c:ext xmlns:c16r3="http://schemas.microsoft.com/office/drawing/2017/03/chart" uri="{56B9EC1D-385E-4148-901F-78D8002777C0}">
         <c16r3:dataDisplayOptions16>
@@ -475,7 +476,6 @@
         </c16r3:dataDisplayOptions16>
       </c:ext>
     </c:extLst>
-    <c:showDLblsOverMax val="0"/>
   </c:chart>
   <c:spPr>
     <a:noFill/>
@@ -885,6 +885,7 @@
     </c:plotArea>
     <c:plotVisOnly val="1"/>
     <c:dispBlanksAs val="gap"/>
+    <c:showDLblsOverMax val="0"/>
     <c:extLst>
       <c:ext xmlns:c16r3="http://schemas.microsoft.com/office/drawing/2017/03/chart" uri="{56B9EC1D-385E-4148-901F-78D8002777C0}">
         <c16r3:dataDisplayOptions16>
@@ -892,7 +893,6 @@
         </c16r3:dataDisplayOptions16>
       </c:ext>
     </c:extLst>
-    <c:showDLblsOverMax val="0"/>
   </c:chart>
   <c:spPr>
     <a:noFill/>
@@ -2225,6 +2225,7 @@
     </c:legend>
     <c:plotVisOnly val="1"/>
     <c:dispBlanksAs val="gap"/>
+    <c:showDLblsOverMax val="0"/>
     <c:extLst>
       <c:ext xmlns:c16r3="http://schemas.microsoft.com/office/drawing/2017/03/chart" uri="{56B9EC1D-385E-4148-901F-78D8002777C0}">
         <c16r3:dataDisplayOptions16>
@@ -2232,7 +2233,6 @@
         </c16r3:dataDisplayOptions16>
       </c:ext>
     </c:extLst>
-    <c:showDLblsOverMax val="0"/>
   </c:chart>
   <c:spPr>
     <a:noFill/>
@@ -2944,6 +2944,7 @@
     </c:legend>
     <c:plotVisOnly val="1"/>
     <c:dispBlanksAs val="gap"/>
+    <c:showDLblsOverMax val="0"/>
     <c:extLst>
       <c:ext xmlns:c16r3="http://schemas.microsoft.com/office/drawing/2017/03/chart" uri="{56B9EC1D-385E-4148-901F-78D8002777C0}">
         <c16r3:dataDisplayOptions16>
@@ -2951,7 +2952,6 @@
         </c16r3:dataDisplayOptions16>
       </c:ext>
     </c:extLst>
-    <c:showDLblsOverMax val="0"/>
   </c:chart>
   <c:spPr>
     <a:noFill/>
@@ -3671,6 +3671,7 @@
     </c:legend>
     <c:plotVisOnly val="1"/>
     <c:dispBlanksAs val="gap"/>
+    <c:showDLblsOverMax val="0"/>
     <c:extLst>
       <c:ext xmlns:c16r3="http://schemas.microsoft.com/office/drawing/2017/03/chart" uri="{56B9EC1D-385E-4148-901F-78D8002777C0}">
         <c16r3:dataDisplayOptions16>
@@ -3678,7 +3679,6 @@
         </c16r3:dataDisplayOptions16>
       </c:ext>
     </c:extLst>
-    <c:showDLblsOverMax val="0"/>
   </c:chart>
   <c:spPr>
     <a:noFill/>
@@ -4195,7 +4195,7 @@
               <c:strCache>
                 <c:ptCount val="1"/>
                 <c:pt idx="0">
-                  <c:v>Asian/Pacific Islander</c:v>
+                  <c:v>Asian American/Pacific Islander</c:v>
                 </c:pt>
               </c:strCache>
             </c:strRef>
@@ -4859,6 +4859,7 @@
     </c:legend>
     <c:plotVisOnly val="1"/>
     <c:dispBlanksAs val="gap"/>
+    <c:showDLblsOverMax val="0"/>
     <c:extLst>
       <c:ext xmlns:c16r3="http://schemas.microsoft.com/office/drawing/2017/03/chart" uri="{56B9EC1D-385E-4148-901F-78D8002777C0}">
         <c16r3:dataDisplayOptions16>
@@ -4866,7 +4867,6 @@
         </c16r3:dataDisplayOptions16>
       </c:ext>
     </c:extLst>
-    <c:showDLblsOverMax val="0"/>
   </c:chart>
   <c:spPr>
     <a:noFill/>
@@ -5383,7 +5383,7 @@
               <c:strCache>
                 <c:ptCount val="1"/>
                 <c:pt idx="0">
-                  <c:v>Asian/Pacific Islander</c:v>
+                  <c:v>Asian American/Pacific Islander</c:v>
                 </c:pt>
               </c:strCache>
             </c:strRef>
@@ -6047,6 +6047,7 @@
     </c:legend>
     <c:plotVisOnly val="1"/>
     <c:dispBlanksAs val="gap"/>
+    <c:showDLblsOverMax val="0"/>
     <c:extLst>
       <c:ext xmlns:c16r3="http://schemas.microsoft.com/office/drawing/2017/03/chart" uri="{56B9EC1D-385E-4148-901F-78D8002777C0}">
         <c16r3:dataDisplayOptions16>
@@ -6054,7 +6055,6 @@
         </c16r3:dataDisplayOptions16>
       </c:ext>
     </c:extLst>
-    <c:showDLblsOverMax val="0"/>
   </c:chart>
   <c:spPr>
     <a:noFill/>
@@ -10242,7 +10242,7 @@
           <a:p>
             <a:fld id="{5BA7D939-328E-4FDC-8520-F2EE74C8E8C4}" type="datetimeFigureOut">
               <a:rPr lang="en-US" smtClean="0"/>
-              <a:t>12/23/2025</a:t>
+              <a:t>5/13/2026</a:t>
             </a:fld>
             <a:endParaRPr lang="en-US"/>
           </a:p>
@@ -10450,7 +10450,7 @@
           <a:p>
             <a:fld id="{5BA7D939-328E-4FDC-8520-F2EE74C8E8C4}" type="datetimeFigureOut">
               <a:rPr lang="en-US" smtClean="0"/>
-              <a:t>12/23/2025</a:t>
+              <a:t>5/13/2026</a:t>
             </a:fld>
             <a:endParaRPr lang="en-US"/>
           </a:p>
@@ -10659,7 +10659,7 @@
           <a:p>
             <a:fld id="{5BA7D939-328E-4FDC-8520-F2EE74C8E8C4}" type="datetimeFigureOut">
               <a:rPr lang="en-US" smtClean="0"/>
-              <a:t>12/23/2025</a:t>
+              <a:t>5/13/2026</a:t>
             </a:fld>
             <a:endParaRPr lang="en-US"/>
           </a:p>
@@ -10974,7 +10974,7 @@
           <a:p>
             <a:fld id="{5BA7D939-328E-4FDC-8520-F2EE74C8E8C4}" type="datetimeFigureOut">
               <a:rPr lang="en-US" smtClean="0"/>
-              <a:t>12/23/2025</a:t>
+              <a:t>5/13/2026</a:t>
             </a:fld>
             <a:endParaRPr lang="en-US"/>
           </a:p>
@@ -11280,7 +11280,7 @@
           <a:p>
             <a:fld id="{5BA7D939-328E-4FDC-8520-F2EE74C8E8C4}" type="datetimeFigureOut">
               <a:rPr lang="en-US" smtClean="0"/>
-              <a:t>12/23/2025</a:t>
+              <a:t>5/13/2026</a:t>
             </a:fld>
             <a:endParaRPr lang="en-US"/>
           </a:p>
@@ -11728,7 +11728,7 @@
           <a:p>
             <a:fld id="{5BA7D939-328E-4FDC-8520-F2EE74C8E8C4}" type="datetimeFigureOut">
               <a:rPr lang="en-US" smtClean="0"/>
-              <a:t>12/23/2025</a:t>
+              <a:t>5/13/2026</a:t>
             </a:fld>
             <a:endParaRPr lang="en-US"/>
           </a:p>
@@ -11910,7 +11910,7 @@
           <a:p>
             <a:fld id="{5BA7D939-328E-4FDC-8520-F2EE74C8E8C4}" type="datetimeFigureOut">
               <a:rPr lang="en-US" smtClean="0"/>
-              <a:t>12/23/2025</a:t>
+              <a:t>5/13/2026</a:t>
             </a:fld>
             <a:endParaRPr lang="en-US"/>
           </a:p>
@@ -12059,7 +12059,7 @@
           <a:p>
             <a:fld id="{5BA7D939-328E-4FDC-8520-F2EE74C8E8C4}" type="datetimeFigureOut">
               <a:rPr lang="en-US" smtClean="0"/>
-              <a:t>12/23/2025</a:t>
+              <a:t>5/13/2026</a:t>
             </a:fld>
             <a:endParaRPr lang="en-US"/>
           </a:p>
@@ -12407,7 +12407,7 @@
           <a:p>
             <a:fld id="{5BA7D939-328E-4FDC-8520-F2EE74C8E8C4}" type="datetimeFigureOut">
               <a:rPr lang="en-US" smtClean="0"/>
-              <a:t>12/23/2025</a:t>
+              <a:t>5/13/2026</a:t>
             </a:fld>
             <a:endParaRPr lang="en-US"/>
           </a:p>
@@ -12735,7 +12735,7 @@
           <a:p>
             <a:fld id="{5BA7D939-328E-4FDC-8520-F2EE74C8E8C4}" type="datetimeFigureOut">
               <a:rPr lang="en-US" smtClean="0"/>
-              <a:t>12/23/2025</a:t>
+              <a:t>5/13/2026</a:t>
             </a:fld>
             <a:endParaRPr lang="en-US"/>
           </a:p>
@@ -13013,7 +13013,7 @@
           <a:p>
             <a:fld id="{5BA7D939-328E-4FDC-8520-F2EE74C8E8C4}" type="datetimeFigureOut">
               <a:rPr lang="en-US" smtClean="0"/>
-              <a:t>12/23/2025</a:t>
+              <a:t>5/13/2026</a:t>
             </a:fld>
             <a:endParaRPr lang="en-US"/>
           </a:p>
@@ -13488,108 +13488,114 @@
           <a:p>
             <a:pPr algn="l"/>
             <a:r>
-              <a:rPr lang="en-US" sz="1800" dirty="0">
+              <a:rPr lang="en-US" sz="2000" dirty="0">
                 <a:effectLst/>
-                <a:latin typeface="Calibri" panose="020F0502020204030204" pitchFamily="34" charset="0"/>
+                <a:latin typeface="+mn-lt"/>
                 <a:ea typeface="Times New Roman" panose="02020603050405020304" pitchFamily="18" charset="0"/>
               </a:rPr>
               <a:t>The crude prevalence of Military Health System (MHS) beneficiaries with CKD stages 3–5 (estimated glomerular filtration rate [eGFR] &lt;60 ml/min/1.73</a:t>
             </a:r>
             <a:r>
-              <a:rPr lang="en-US" sz="1800" baseline="30000" dirty="0">
+              <a:rPr lang="en-US" sz="2000" baseline="30000" dirty="0">
                 <a:effectLst/>
-                <a:latin typeface="Calibri" panose="020F0502020204030204" pitchFamily="34" charset="0"/>
+                <a:latin typeface="+mn-lt"/>
                 <a:ea typeface="Times New Roman" panose="02020603050405020304" pitchFamily="18" charset="0"/>
               </a:rPr>
               <a:t>2</a:t>
             </a:r>
             <a:r>
-              <a:rPr lang="en-US" sz="1800" dirty="0">
+              <a:rPr lang="en-US" sz="2000" dirty="0">
                 <a:effectLst/>
-                <a:latin typeface="Calibri" panose="020F0502020204030204" pitchFamily="34" charset="0"/>
+                <a:latin typeface="+mn-lt"/>
                 <a:ea typeface="Times New Roman" panose="02020603050405020304" pitchFamily="18" charset="0"/>
               </a:rPr>
               <a:t>) ranged from 5.9% to 4.</a:t>
             </a:r>
             <a:r>
-              <a:rPr lang="en-US" sz="1800" dirty="0">
+              <a:rPr lang="en-US" sz="2000" dirty="0">
                 <a:effectLst/>
-                <a:latin typeface="Calibri" panose="020F0502020204030204" pitchFamily="34" charset="0"/>
+                <a:latin typeface="+mn-lt"/>
                 <a:ea typeface="Malgun Gothic" panose="020B0503020000020004" pitchFamily="34" charset="-127"/>
               </a:rPr>
               <a:t>8</a:t>
             </a:r>
             <a:r>
-              <a:rPr lang="en-US" sz="1800" dirty="0">
+              <a:rPr lang="en-US" sz="2000" dirty="0">
                 <a:effectLst/>
-                <a:latin typeface="Calibri" panose="020F0502020204030204" pitchFamily="34" charset="0"/>
+                <a:latin typeface="+mn-lt"/>
                 <a:ea typeface="Times New Roman" panose="02020603050405020304" pitchFamily="18" charset="0"/>
               </a:rPr>
               <a:t>% during 2009–202</a:t>
             </a:r>
             <a:r>
-              <a:rPr lang="en-US" sz="1800" dirty="0">
+              <a:rPr lang="en-US" sz="2000" dirty="0">
                 <a:effectLst/>
-                <a:latin typeface="Calibri" panose="020F0502020204030204" pitchFamily="34" charset="0"/>
+                <a:latin typeface="+mn-lt"/>
                 <a:ea typeface="Malgun Gothic" panose="020B0503020000020004" pitchFamily="34" charset="-127"/>
               </a:rPr>
               <a:t>3</a:t>
             </a:r>
             <a:r>
-              <a:rPr lang="en-US" sz="1800" dirty="0">
+              <a:rPr lang="en-US" sz="2000" dirty="0">
                 <a:effectLst/>
-                <a:latin typeface="Calibri" panose="020F0502020204030204" pitchFamily="34" charset="0"/>
+                <a:latin typeface="+mn-lt"/>
                 <a:ea typeface="Times New Roman" panose="02020603050405020304" pitchFamily="18" charset="0"/>
               </a:rPr>
               <a:t>. The age-standardized prevalence decreased from </a:t>
             </a:r>
             <a:r>
-              <a:rPr lang="en-US" sz="1800" dirty="0">
+              <a:rPr lang="en-US" sz="2000" dirty="0">
                 <a:effectLst/>
-                <a:latin typeface="Calibri" panose="020F0502020204030204" pitchFamily="34" charset="0"/>
+                <a:latin typeface="+mn-lt"/>
                 <a:ea typeface="Malgun Gothic" panose="020B0503020000020004" pitchFamily="34" charset="-127"/>
               </a:rPr>
               <a:t>7.7</a:t>
             </a:r>
             <a:r>
-              <a:rPr lang="en-US" sz="1800" dirty="0">
+              <a:rPr lang="en-US" sz="2000" dirty="0">
                 <a:effectLst/>
-                <a:latin typeface="Calibri" panose="020F0502020204030204" pitchFamily="34" charset="0"/>
+                <a:latin typeface="+mn-lt"/>
                 <a:ea typeface="Times New Roman" panose="02020603050405020304" pitchFamily="18" charset="0"/>
               </a:rPr>
               <a:t>% to 5.6%. The crude prevalence of CKD stages 3–5 was highest in adults aged ≥70 years and Black adults</a:t>
             </a:r>
             <a:r>
-              <a:rPr lang="en-US" sz="1800" dirty="0">
+              <a:rPr lang="en-US" sz="2000" dirty="0">
                 <a:effectLst/>
-                <a:latin typeface="Calibri" panose="020F0502020204030204" pitchFamily="34" charset="0"/>
+                <a:latin typeface="+mn-lt"/>
                 <a:ea typeface="Malgun Gothic" panose="020B0503020000020004" pitchFamily="34" charset="-127"/>
               </a:rPr>
               <a:t> (among those with known race and ethnicity)</a:t>
             </a:r>
             <a:r>
-              <a:rPr lang="en-US" sz="1800" dirty="0">
+              <a:rPr lang="en-US" sz="2000" dirty="0">
                 <a:effectLst/>
-                <a:latin typeface="Calibri" panose="020F0502020204030204" pitchFamily="34" charset="0"/>
+                <a:latin typeface="+mn-lt"/>
                 <a:ea typeface="Times New Roman" panose="02020603050405020304" pitchFamily="18" charset="0"/>
               </a:rPr>
-              <a:t>. The age-standardized prevalence was highest in Black adults compared with their counterparts. </a:t>
+              <a:t>. The age-standardized prevalence was higher in Black adults compared with their counterparts. </a:t>
             </a:r>
-            <a:endParaRPr lang="en-US" dirty="0">
-              <a:latin typeface="Calibri" panose="020F0502020204030204" pitchFamily="34" charset="0"/>
+            <a:endParaRPr lang="en-US" sz="2000" dirty="0">
+              <a:latin typeface="+mn-lt"/>
             </a:endParaRPr>
           </a:p>
           <a:p>
             <a:pPr algn="l"/>
             <a:r>
-              <a:rPr lang="en-US" b="1" dirty="0"/>
+              <a:rPr lang="en-US" sz="2000" b="1" dirty="0">
+                <a:latin typeface="+mn-lt"/>
+              </a:rPr>
               <a:t>Data Source: </a:t>
             </a:r>
             <a:r>
-              <a:rPr lang="en-US" dirty="0"/>
-              <a:t>DoD-MHS</a:t>
+              <a:rPr lang="en-US" sz="2000" dirty="0">
+                <a:latin typeface="+mn-lt"/>
+              </a:rPr>
+              <a:t>MHS</a:t>
             </a:r>
-            <a:endParaRPr lang="en-US" b="1" dirty="0"/>
+            <a:endParaRPr lang="en-US" sz="2000" b="1" dirty="0">
+              <a:latin typeface="+mn-lt"/>
+            </a:endParaRPr>
           </a:p>
         </p:txBody>
       </p:sp>
@@ -14191,7 +14197,7 @@
           <p:nvPr>
             <p:extLst>
               <p:ext uri="{D42A27DB-BD31-4B8C-83A1-F6EECF244321}">
-                <p14:modId xmlns:p14="http://schemas.microsoft.com/office/powerpoint/2010/main" val="1312897891"/>
+                <p14:modId xmlns:p14="http://schemas.microsoft.com/office/powerpoint/2010/main" val="274363723"/>
               </p:ext>
             </p:extLst>
           </p:nvPr>
@@ -14286,7 +14292,7 @@
           <p:nvPr>
             <p:extLst>
               <p:ext uri="{D42A27DB-BD31-4B8C-83A1-F6EECF244321}">
-                <p14:modId xmlns:p14="http://schemas.microsoft.com/office/powerpoint/2010/main" val="1271153685"/>
+                <p14:modId xmlns:p14="http://schemas.microsoft.com/office/powerpoint/2010/main" val="2293839170"/>
               </p:ext>
             </p:extLst>
           </p:nvPr>
@@ -14607,4 +14613,251 @@
     </a:ext>
   </a:extLst>
 </a:theme>
+</file>
+
+<file path=customXml/item1.xml><?xml version="1.0" encoding="utf-8"?>
+<p:properties xmlns:p="http://schemas.microsoft.com/office/2006/metadata/properties" xmlns:xsi="http://www.w3.org/2001/XMLSchema-instance" xmlns:pc="http://schemas.microsoft.com/office/infopath/2007/PartnerControls">
+  <documentManagement>
+    <lcf76f155ced4ddcb4097134ff3c332f xmlns="5749bc8e-1545-4b42-a651-f1b0ccdc5fa5">
+      <Terms xmlns="http://schemas.microsoft.com/office/infopath/2007/PartnerControls"/>
+    </lcf76f155ced4ddcb4097134ff3c332f>
+    <TaxCatchAll xmlns="8e022c51-0240-47ac-b7b0-09a2f3086777" xsi:nil="true"/>
+  </documentManagement>
+</p:properties>
+</file>
+
+<file path=customXml/item2.xml><?xml version="1.0" encoding="utf-8"?>
+<?mso-contentType ?>
+<FormTemplates xmlns="http://schemas.microsoft.com/sharepoint/v3/contenttype/forms">
+  <Display>DocumentLibraryForm</Display>
+  <Edit>DocumentLibraryForm</Edit>
+  <New>DocumentLibraryForm</New>
+</FormTemplates>
+</file>
+
+<file path=customXml/item3.xml><?xml version="1.0" encoding="utf-8"?>
+<ct:contentTypeSchema xmlns:ct="http://schemas.microsoft.com/office/2006/metadata/contentType" xmlns:ma="http://schemas.microsoft.com/office/2006/metadata/properties/metaAttributes" ct:_="" ma:_="" ma:contentTypeName="Document" ma:contentTypeID="0x01010050BC9B24C2BC4648A822105B302116B0" ma:contentTypeVersion="10" ma:contentTypeDescription="Create a new document." ma:contentTypeScope="" ma:versionID="581fb2d9703863f3db532522de69a7d8">
+  <xsd:schema xmlns:xsd="http://www.w3.org/2001/XMLSchema" xmlns:xs="http://www.w3.org/2001/XMLSchema" xmlns:p="http://schemas.microsoft.com/office/2006/metadata/properties" xmlns:ns2="5749bc8e-1545-4b42-a651-f1b0ccdc5fa5" xmlns:ns3="8e022c51-0240-47ac-b7b0-09a2f3086777" targetNamespace="http://schemas.microsoft.com/office/2006/metadata/properties" ma:root="true" ma:fieldsID="96cb22f3222442646e545c3c1fc94001" ns2:_="" ns3:_="">
+    <xsd:import namespace="5749bc8e-1545-4b42-a651-f1b0ccdc5fa5"/>
+    <xsd:import namespace="8e022c51-0240-47ac-b7b0-09a2f3086777"/>
+    <xsd:element name="properties">
+      <xsd:complexType>
+        <xsd:sequence>
+          <xsd:element name="documentManagement">
+            <xsd:complexType>
+              <xsd:all>
+                <xsd:element ref="ns2:MediaServiceMetadata" minOccurs="0"/>
+                <xsd:element ref="ns2:MediaServiceFastMetadata" minOccurs="0"/>
+                <xsd:element ref="ns2:MediaServiceSearchProperties" minOccurs="0"/>
+                <xsd:element ref="ns2:MediaServiceDateTaken" minOccurs="0"/>
+                <xsd:element ref="ns2:lcf76f155ced4ddcb4097134ff3c332f" minOccurs="0"/>
+                <xsd:element ref="ns3:TaxCatchAll" minOccurs="0"/>
+                <xsd:element ref="ns2:MediaServiceOCR" minOccurs="0"/>
+                <xsd:element ref="ns2:MediaServiceGenerationTime" minOccurs="0"/>
+                <xsd:element ref="ns2:MediaServiceEventHashCode" minOccurs="0"/>
+              </xsd:all>
+            </xsd:complexType>
+          </xsd:element>
+        </xsd:sequence>
+      </xsd:complexType>
+    </xsd:element>
+  </xsd:schema>
+  <xsd:schema xmlns:xsd="http://www.w3.org/2001/XMLSchema" xmlns:xs="http://www.w3.org/2001/XMLSchema" xmlns:dms="http://schemas.microsoft.com/office/2006/documentManagement/types" xmlns:pc="http://schemas.microsoft.com/office/infopath/2007/PartnerControls" targetNamespace="5749bc8e-1545-4b42-a651-f1b0ccdc5fa5" elementFormDefault="qualified">
+    <xsd:import namespace="http://schemas.microsoft.com/office/2006/documentManagement/types"/>
+    <xsd:import namespace="http://schemas.microsoft.com/office/infopath/2007/PartnerControls"/>
+    <xsd:element name="MediaServiceMetadata" ma:index="8" nillable="true" ma:displayName="MediaServiceMetadata" ma:hidden="true" ma:internalName="MediaServiceMetadata" ma:readOnly="true">
+      <xsd:simpleType>
+        <xsd:restriction base="dms:Note"/>
+      </xsd:simpleType>
+    </xsd:element>
+    <xsd:element name="MediaServiceFastMetadata" ma:index="9" nillable="true" ma:displayName="MediaServiceFastMetadata" ma:hidden="true" ma:internalName="MediaServiceFastMetadata" ma:readOnly="true">
+      <xsd:simpleType>
+        <xsd:restriction base="dms:Note"/>
+      </xsd:simpleType>
+    </xsd:element>
+    <xsd:element name="MediaServiceSearchProperties" ma:index="10" nillable="true" ma:displayName="MediaServiceSearchProperties" ma:hidden="true" ma:internalName="MediaServiceSearchProperties" ma:readOnly="true">
+      <xsd:simpleType>
+        <xsd:restriction base="dms:Note"/>
+      </xsd:simpleType>
+    </xsd:element>
+    <xsd:element name="MediaServiceDateTaken" ma:index="11" nillable="true" ma:displayName="MediaServiceDateTaken" ma:hidden="true" ma:indexed="true" ma:internalName="MediaServiceDateTaken" ma:readOnly="true">
+      <xsd:simpleType>
+        <xsd:restriction base="dms:Text"/>
+      </xsd:simpleType>
+    </xsd:element>
+    <xsd:element name="lcf76f155ced4ddcb4097134ff3c332f" ma:index="13" nillable="true" ma:taxonomy="true" ma:internalName="lcf76f155ced4ddcb4097134ff3c332f" ma:taxonomyFieldName="MediaServiceImageTags" ma:displayName="Image Tags" ma:readOnly="false" ma:fieldId="{5cf76f15-5ced-4ddc-b409-7134ff3c332f}" ma:taxonomyMulti="true" ma:sspId="cae6c5d7-b21f-4aaa-ac91-296ecc6194c0" ma:termSetId="09814cd3-568e-fe90-9814-8d621ff8fb84" ma:anchorId="fba54fb3-c3e1-fe81-a776-ca4b69148c4d" ma:open="true" ma:isKeyword="false">
+      <xsd:complexType>
+        <xsd:sequence>
+          <xsd:element ref="pc:Terms" minOccurs="0" maxOccurs="1"/>
+        </xsd:sequence>
+      </xsd:complexType>
+    </xsd:element>
+    <xsd:element name="MediaServiceOCR" ma:index="15" nillable="true" ma:displayName="Extracted Text" ma:internalName="MediaServiceOCR" ma:readOnly="true">
+      <xsd:simpleType>
+        <xsd:restriction base="dms:Note">
+          <xsd:maxLength value="255"/>
+        </xsd:restriction>
+      </xsd:simpleType>
+    </xsd:element>
+    <xsd:element name="MediaServiceGenerationTime" ma:index="16" nillable="true" ma:displayName="MediaServiceGenerationTime" ma:hidden="true" ma:internalName="MediaServiceGenerationTime" ma:readOnly="true">
+      <xsd:simpleType>
+        <xsd:restriction base="dms:Text"/>
+      </xsd:simpleType>
+    </xsd:element>
+    <xsd:element name="MediaServiceEventHashCode" ma:index="17" nillable="true" ma:displayName="MediaServiceEventHashCode" ma:hidden="true" ma:internalName="MediaServiceEventHashCode" ma:readOnly="true">
+      <xsd:simpleType>
+        <xsd:restriction base="dms:Text"/>
+      </xsd:simpleType>
+    </xsd:element>
+  </xsd:schema>
+  <xsd:schema xmlns:xsd="http://www.w3.org/2001/XMLSchema" xmlns:xs="http://www.w3.org/2001/XMLSchema" xmlns:dms="http://schemas.microsoft.com/office/2006/documentManagement/types" xmlns:pc="http://schemas.microsoft.com/office/infopath/2007/PartnerControls" targetNamespace="8e022c51-0240-47ac-b7b0-09a2f3086777" elementFormDefault="qualified">
+    <xsd:import namespace="http://schemas.microsoft.com/office/2006/documentManagement/types"/>
+    <xsd:import namespace="http://schemas.microsoft.com/office/infopath/2007/PartnerControls"/>
+    <xsd:element name="TaxCatchAll" ma:index="14" nillable="true" ma:displayName="Taxonomy Catch All Column" ma:hidden="true" ma:list="{4f07c378-3462-46dc-a28e-833745c64bfd}" ma:internalName="TaxCatchAll" ma:showField="CatchAllData" ma:web="8e022c51-0240-47ac-b7b0-09a2f3086777">
+      <xsd:complexType>
+        <xsd:complexContent>
+          <xsd:extension base="dms:MultiChoiceLookup">
+            <xsd:sequence>
+              <xsd:element name="Value" type="dms:Lookup" maxOccurs="unbounded" minOccurs="0" nillable="true"/>
+            </xsd:sequence>
+          </xsd:extension>
+        </xsd:complexContent>
+      </xsd:complexType>
+    </xsd:element>
+  </xsd:schema>
+  <xsd:schema xmlns="http://schemas.openxmlformats.org/package/2006/metadata/core-properties" xmlns:xsd="http://www.w3.org/2001/XMLSchema" xmlns:xsi="http://www.w3.org/2001/XMLSchema-instance" xmlns:dc="http://purl.org/dc/elements/1.1/" xmlns:dcterms="http://purl.org/dc/terms/" xmlns:odoc="http://schemas.microsoft.com/internal/obd" targetNamespace="http://schemas.openxmlformats.org/package/2006/metadata/core-properties" elementFormDefault="qualified" attributeFormDefault="unqualified" blockDefault="#all">
+    <xsd:import namespace="http://purl.org/dc/elements/1.1/" schemaLocation="http://dublincore.org/schemas/xmls/qdc/2003/04/02/dc.xsd"/>
+    <xsd:import namespace="http://purl.org/dc/terms/" schemaLocation="http://dublincore.org/schemas/xmls/qdc/2003/04/02/dcterms.xsd"/>
+    <xsd:element name="coreProperties" type="CT_coreProperties"/>
+    <xsd:complexType name="CT_coreProperties">
+      <xsd:all>
+        <xsd:element ref="dc:creator" minOccurs="0" maxOccurs="1"/>
+        <xsd:element ref="dcterms:created" minOccurs="0" maxOccurs="1"/>
+        <xsd:element ref="dc:identifier" minOccurs="0" maxOccurs="1"/>
+        <xsd:element name="contentType" minOccurs="0" maxOccurs="1" type="xsd:string" ma:index="0" ma:displayName="Content Type"/>
+        <xsd:element ref="dc:title" minOccurs="0" maxOccurs="1" ma:index="4" ma:displayName="Title"/>
+        <xsd:element ref="dc:subject" minOccurs="0" maxOccurs="1"/>
+        <xsd:element ref="dc:description" minOccurs="0" maxOccurs="1"/>
+        <xsd:element name="keywords" minOccurs="0" maxOccurs="1" type="xsd:string"/>
+        <xsd:element ref="dc:language" minOccurs="0" maxOccurs="1"/>
+        <xsd:element name="category" minOccurs="0" maxOccurs="1" type="xsd:string"/>
+        <xsd:element name="version" minOccurs="0" maxOccurs="1" type="xsd:string"/>
+        <xsd:element name="revision" minOccurs="0" maxOccurs="1" type="xsd:string">
+          <xsd:annotation>
+            <xsd:documentation>
+                        This value indicates the number of saves or revisions. The application is responsible for updating this value after each revision.
+                    </xsd:documentation>
+          </xsd:annotation>
+        </xsd:element>
+        <xsd:element name="lastModifiedBy" minOccurs="0" maxOccurs="1" type="xsd:string"/>
+        <xsd:element ref="dcterms:modified" minOccurs="0" maxOccurs="1"/>
+        <xsd:element name="contentStatus" minOccurs="0" maxOccurs="1" type="xsd:string"/>
+      </xsd:all>
+    </xsd:complexType>
+  </xsd:schema>
+  <xs:schema xmlns:pc="http://schemas.microsoft.com/office/infopath/2007/PartnerControls" xmlns:xs="http://www.w3.org/2001/XMLSchema" targetNamespace="http://schemas.microsoft.com/office/infopath/2007/PartnerControls" elementFormDefault="qualified" attributeFormDefault="unqualified">
+    <xs:element name="Person">
+      <xs:complexType>
+        <xs:sequence>
+          <xs:element ref="pc:DisplayName" minOccurs="0"/>
+          <xs:element ref="pc:AccountId" minOccurs="0"/>
+          <xs:element ref="pc:AccountType" minOccurs="0"/>
+        </xs:sequence>
+      </xs:complexType>
+    </xs:element>
+    <xs:element name="DisplayName" type="xs:string"/>
+    <xs:element name="AccountId" type="xs:string"/>
+    <xs:element name="AccountType" type="xs:string"/>
+    <xs:element name="BDCAssociatedEntity">
+      <xs:complexType>
+        <xs:sequence>
+          <xs:element ref="pc:BDCEntity" minOccurs="0" maxOccurs="unbounded"/>
+        </xs:sequence>
+        <xs:attribute ref="pc:EntityNamespace"/>
+        <xs:attribute ref="pc:EntityName"/>
+        <xs:attribute ref="pc:SystemInstanceName"/>
+        <xs:attribute ref="pc:AssociationName"/>
+      </xs:complexType>
+    </xs:element>
+    <xs:attribute name="EntityNamespace" type="xs:string"/>
+    <xs:attribute name="EntityName" type="xs:string"/>
+    <xs:attribute name="SystemInstanceName" type="xs:string"/>
+    <xs:attribute name="AssociationName" type="xs:string"/>
+    <xs:element name="BDCEntity">
+      <xs:complexType>
+        <xs:sequence>
+          <xs:element ref="pc:EntityDisplayName" minOccurs="0"/>
+          <xs:element ref="pc:EntityInstanceReference" minOccurs="0"/>
+          <xs:element ref="pc:EntityId1" minOccurs="0"/>
+          <xs:element ref="pc:EntityId2" minOccurs="0"/>
+          <xs:element ref="pc:EntityId3" minOccurs="0"/>
+          <xs:element ref="pc:EntityId4" minOccurs="0"/>
+          <xs:element ref="pc:EntityId5" minOccurs="0"/>
+        </xs:sequence>
+      </xs:complexType>
+    </xs:element>
+    <xs:element name="EntityDisplayName" type="xs:string"/>
+    <xs:element name="EntityInstanceReference" type="xs:string"/>
+    <xs:element name="EntityId1" type="xs:string"/>
+    <xs:element name="EntityId2" type="xs:string"/>
+    <xs:element name="EntityId3" type="xs:string"/>
+    <xs:element name="EntityId4" type="xs:string"/>
+    <xs:element name="EntityId5" type="xs:string"/>
+    <xs:element name="Terms">
+      <xs:complexType>
+        <xs:sequence>
+          <xs:element ref="pc:TermInfo" minOccurs="0" maxOccurs="unbounded"/>
+        </xs:sequence>
+      </xs:complexType>
+    </xs:element>
+    <xs:element name="TermInfo">
+      <xs:complexType>
+        <xs:sequence>
+          <xs:element ref="pc:TermName" minOccurs="0"/>
+          <xs:element ref="pc:TermId" minOccurs="0"/>
+        </xs:sequence>
+      </xs:complexType>
+    </xs:element>
+    <xs:element name="TermName" type="xs:string"/>
+    <xs:element name="TermId" type="xs:string"/>
+  </xs:schema>
+</ct:contentTypeSchema>
+</file>
+
+<file path=customXml/itemProps1.xml><?xml version="1.0" encoding="utf-8"?>
+<ds:datastoreItem xmlns:ds="http://schemas.openxmlformats.org/officeDocument/2006/customXml" ds:itemID="{D10DEA2A-2DDF-474E-9239-B8EC4647655C}">
+  <ds:schemaRefs>
+    <ds:schemaRef ds:uri="http://schemas.microsoft.com/office/2006/metadata/properties"/>
+    <ds:schemaRef ds:uri="http://schemas.microsoft.com/office/infopath/2007/PartnerControls"/>
+    <ds:schemaRef ds:uri="5749bc8e-1545-4b42-a651-f1b0ccdc5fa5"/>
+    <ds:schemaRef ds:uri="8e022c51-0240-47ac-b7b0-09a2f3086777"/>
+  </ds:schemaRefs>
+</ds:datastoreItem>
+</file>
+
+<file path=customXml/itemProps2.xml><?xml version="1.0" encoding="utf-8"?>
+<ds:datastoreItem xmlns:ds="http://schemas.openxmlformats.org/officeDocument/2006/customXml" ds:itemID="{5191AF3F-F6A5-42D5-A276-685BBDEEC7F6}">
+  <ds:schemaRefs>
+    <ds:schemaRef ds:uri="http://schemas.microsoft.com/sharepoint/v3/contenttype/forms"/>
+  </ds:schemaRefs>
+</ds:datastoreItem>
+</file>
+
+<file path=customXml/itemProps3.xml><?xml version="1.0" encoding="utf-8"?>
+<ds:datastoreItem xmlns:ds="http://schemas.openxmlformats.org/officeDocument/2006/customXml" ds:itemID="{FEF6F2BE-E755-4252-85C7-430D64221090}">
+  <ds:schemaRefs>
+    <ds:schemaRef ds:uri="http://schemas.microsoft.com/office/2006/metadata/contentType"/>
+    <ds:schemaRef ds:uri="http://schemas.microsoft.com/office/2006/metadata/properties/metaAttributes"/>
+    <ds:schemaRef ds:uri="http://www.w3.org/2001/XMLSchema"/>
+    <ds:schemaRef ds:uri="http://schemas.microsoft.com/office/2006/metadata/properties"/>
+    <ds:schemaRef ds:uri="5749bc8e-1545-4b42-a651-f1b0ccdc5fa5"/>
+    <ds:schemaRef ds:uri="8e022c51-0240-47ac-b7b0-09a2f3086777"/>
+    <ds:schemaRef ds:uri="http://schemas.microsoft.com/office/2006/documentManagement/types"/>
+    <ds:schemaRef ds:uri="http://schemas.microsoft.com/office/infopath/2007/PartnerControls"/>
+    <ds:schemaRef ds:uri="http://schemas.openxmlformats.org/package/2006/metadata/core-properties"/>
+    <ds:schemaRef ds:uri="http://purl.org/dc/elements/1.1/"/>
+    <ds:schemaRef ds:uri="http://purl.org/dc/terms/"/>
+    <ds:schemaRef ds:uri="http://schemas.microsoft.com/internal/obd"/>
+  </ds:schemaRefs>
+</ds:datastoreItem>
 </file>